--- a/content/W01/D1/C2_W01_D01_deck_half1_STUDENT.pptx
+++ b/content/W01/D1/C2_W01_D01_deck_half1_STUDENT.pptx
@@ -7768,7 +7768,7 @@
                 </a:solidFill>
                 <a:latin typeface="Consolas"/>
               </a:rPr>
-              <a:t>        total = total + r["amount"]</a:t>
+              <a:t>        total = total + int(r["amount"])</a:t>
             </a:r>
           </a:p>
           <a:p>
@@ -8041,7 +8041,7 @@
                 </a:solidFill>
                 <a:latin typeface="Consolas"/>
               </a:rPr>
-              <a:t>        total = total + r["amount"]</a:t>
+              <a:t>        total = total + int(r["amount"])</a:t>
             </a:r>
           </a:p>
           <a:p>

--- a/content/W01/D1/C2_W01_D01_deck_half1_STUDENT.pptx
+++ b/content/W01/D1/C2_W01_D01_deck_half1_STUDENT.pptx
@@ -3205,7 +3205,7 @@
         <p:spPr>
           <a:xfrm>
             <a:off x="777240" y="1965960"/>
-            <a:ext cx="10607040" cy="4206240"/>
+            <a:ext cx="10607040" cy="1162050"/>
           </a:xfrm>
           <a:prstGeom prst="rect">
             <a:avLst/>
@@ -3218,9 +3218,13 @@
           </a:bodyPr>
           <a:lstStyle/>
           <a:p>
-            <a:pPr algn="l"/>
-            <a:r>
-              <a:rPr b="0" sz="2100">
+            <a:pPr>
+              <a:spcAft>
+                <a:spcPts val="1000"/>
+              </a:spcAft>
+            </a:pPr>
+            <a:r>
+              <a:rPr sz="2100" b="0">
                 <a:solidFill>
                   <a:srgbClr val="1C1C1A"/>
                 </a:solidFill>
@@ -3230,26 +3234,18 @@
             </a:r>
           </a:p>
           <a:p>
-            <a:pPr algn="l"/>
-            <a:r>
-              <a:rPr b="0" sz="2100">
+            <a:pPr>
+              <a:spcAft>
+                <a:spcPts val="1000"/>
+              </a:spcAft>
+            </a:pPr>
+            <a:r>
+              <a:rPr sz="2100" b="0">
                 <a:solidFill>
                   <a:srgbClr val="1C1C1A"/>
                 </a:solidFill>
                 <a:latin typeface="Calibri"/>
               </a:rPr>
-              <a:t> </a:t>
-            </a:r>
-          </a:p>
-          <a:p>
-            <a:pPr algn="l"/>
-            <a:r>
-              <a:rPr b="0" sz="2100">
-                <a:solidFill>
-                  <a:srgbClr val="1C1C1A"/>
-                </a:solidFill>
-                <a:latin typeface="Calibri"/>
-              </a:rPr>
               <a:t>For the next stretch you learn what it is holding, why it sometimes refuses you, and how to get it back when it forgets.</a:t>
             </a:r>
           </a:p>
@@ -3263,7 +3259,7 @@
         </p:nvSpPr>
         <p:spPr>
           <a:xfrm>
-            <a:off x="777240" y="6263640"/>
+            <a:off x="777240" y="6309360"/>
             <a:ext cx="10607040" cy="365760"/>
           </a:xfrm>
           <a:prstGeom prst="rect">
@@ -3272,13 +3268,13 @@
           <a:noFill/>
         </p:spPr>
         <p:txBody>
-          <a:bodyPr wrap="square">
-            <a:spAutoFit/>
-          </a:bodyPr>
-          <a:lstStyle/>
-          <a:p>
-            <a:r>
-              <a:rPr sz="1000" b="0">
+          <a:bodyPr wrap="none">
+            <a:spAutoFit/>
+          </a:bodyPr>
+          <a:lstStyle/>
+          <a:p>
+            <a:r>
+              <a:rPr sz="1000">
                 <a:solidFill>
                   <a:srgbClr val="5F6360"/>
                 </a:solidFill>
@@ -3373,6 +3369,7 @@
           </a:bodyPr>
           <a:lstStyle/>
           <a:p>
+            <a:pPr algn="ctr"/>
             <a:r>
               <a:rPr sz="3600" b="1">
                 <a:solidFill>
@@ -3394,7 +3391,7 @@
         <p:spPr>
           <a:xfrm>
             <a:off x="777240" y="1965960"/>
-            <a:ext cx="10607040" cy="4206240"/>
+            <a:ext cx="10607040" cy="790575"/>
           </a:xfrm>
           <a:prstGeom prst="rect">
             <a:avLst/>
@@ -3407,31 +3404,35 @@
           </a:bodyPr>
           <a:lstStyle/>
           <a:p>
-            <a:pPr algn="l"/>
-            <a:r>
-              <a:rPr b="0" sz="1800">
+            <a:pPr algn="ctr">
+              <a:spcAft>
+                <a:spcPts val="1000"/>
+              </a:spcAft>
+            </a:pPr>
+            <a:r>
+              <a:rPr sz="2100" b="0">
                 <a:solidFill>
                   <a:srgbClr val="FFFFFF"/>
                 </a:solidFill>
-                <a:latin typeface="Consolas"/>
+                <a:latin typeface="Calibri"/>
               </a:rPr>
               <a:t>[open the workbench] &gt; </a:t>
             </a:r>
             <a:r>
-              <a:rPr b="1" sz="1800">
+              <a:rPr sz="2100" b="1">
                 <a:solidFill>
                   <a:srgbClr val="FFFFFF"/>
                 </a:solidFill>
-                <a:latin typeface="Consolas"/>
+                <a:latin typeface="Calibri"/>
               </a:rPr>
               <a:t>[the kernel remembers]</a:t>
             </a:r>
             <a:r>
-              <a:rPr b="0" sz="1800">
+              <a:rPr sz="2100" b="0">
                 <a:solidFill>
                   <a:srgbClr val="FFFFFF"/>
                 </a:solidFill>
-                <a:latin typeface="Consolas"/>
+                <a:latin typeface="Calibri"/>
               </a:rPr>
               <a:t> &gt; [type decides] &gt; [walk the records] &gt; [the business answer]</a:t>
             </a:r>
@@ -3446,7 +3447,7 @@
         </p:nvSpPr>
         <p:spPr>
           <a:xfrm>
-            <a:off x="777240" y="6263640"/>
+            <a:off x="777240" y="6309360"/>
             <a:ext cx="10607040" cy="365760"/>
           </a:xfrm>
           <a:prstGeom prst="rect">
@@ -3455,13 +3456,13 @@
           <a:noFill/>
         </p:spPr>
         <p:txBody>
-          <a:bodyPr wrap="square">
-            <a:spAutoFit/>
-          </a:bodyPr>
-          <a:lstStyle/>
-          <a:p>
-            <a:r>
-              <a:rPr sz="1000" b="0">
+          <a:bodyPr wrap="none">
+            <a:spAutoFit/>
+          </a:bodyPr>
+          <a:lstStyle/>
+          <a:p>
+            <a:r>
+              <a:rPr sz="1000">
                 <a:solidFill>
                   <a:srgbClr val="5F6360"/>
                 </a:solidFill>
@@ -3577,7 +3578,7 @@
         <p:spPr>
           <a:xfrm>
             <a:off x="777240" y="1965960"/>
-            <a:ext cx="10607040" cy="4206240"/>
+            <a:ext cx="10607040" cy="1533525"/>
           </a:xfrm>
           <a:prstGeom prst="rect">
             <a:avLst/>
@@ -3590,9 +3591,13 @@
           </a:bodyPr>
           <a:lstStyle/>
           <a:p>
-            <a:pPr algn="l"/>
-            <a:r>
-              <a:rPr b="0" sz="2100">
+            <a:pPr>
+              <a:spcAft>
+                <a:spcPts val="1000"/>
+              </a:spcAft>
+            </a:pPr>
+            <a:r>
+              <a:rPr sz="2100" b="0">
                 <a:solidFill>
                   <a:srgbClr val="1C1C1A"/>
                 </a:solidFill>
@@ -3602,50 +3607,34 @@
             </a:r>
           </a:p>
           <a:p>
-            <a:pPr algn="l"/>
-            <a:r>
-              <a:rPr b="0" sz="2100">
+            <a:pPr>
+              <a:spcAft>
+                <a:spcPts val="1000"/>
+              </a:spcAft>
+            </a:pPr>
+            <a:r>
+              <a:rPr sz="2100" b="0">
                 <a:solidFill>
                   <a:srgbClr val="1C1C1A"/>
                 </a:solidFill>
                 <a:latin typeface="Calibri"/>
               </a:rPr>
-              <a:t> </a:t>
-            </a:r>
-          </a:p>
-          <a:p>
-            <a:pPr algn="l"/>
-            <a:r>
-              <a:rPr b="0" sz="2100">
+              <a:t>Running a cell is you putting something on the bench. Restarting the kernel sweeps the bench clean, and the file on disk is untouched by that.</a:t>
+            </a:r>
+          </a:p>
+          <a:p>
+            <a:pPr>
+              <a:spcAft>
+                <a:spcPts val="1000"/>
+              </a:spcAft>
+            </a:pPr>
+            <a:r>
+              <a:rPr sz="2100" b="0">
                 <a:solidFill>
                   <a:srgbClr val="1C1C1A"/>
                 </a:solidFill>
                 <a:latin typeface="Calibri"/>
               </a:rPr>
-              <a:t>Running a cell is you putting something on the bench. Restarting the kernel sweeps the bench clean, and the file on disk is untouched by that.</a:t>
-            </a:r>
-          </a:p>
-          <a:p>
-            <a:pPr algn="l"/>
-            <a:r>
-              <a:rPr b="0" sz="2100">
-                <a:solidFill>
-                  <a:srgbClr val="1C1C1A"/>
-                </a:solidFill>
-                <a:latin typeface="Calibri"/>
-              </a:rPr>
-              <a:t> </a:t>
-            </a:r>
-          </a:p>
-          <a:p>
-            <a:pPr algn="l"/>
-            <a:r>
-              <a:rPr b="0" sz="2100">
-                <a:solidFill>
-                  <a:srgbClr val="1C1C1A"/>
-                </a:solidFill>
-                <a:latin typeface="Calibri"/>
-              </a:rPr>
               <a:t>This picture is the one we use for the rest of the day.</a:t>
             </a:r>
           </a:p>
@@ -3659,7 +3648,7 @@
         </p:nvSpPr>
         <p:spPr>
           <a:xfrm>
-            <a:off x="777240" y="6263640"/>
+            <a:off x="777240" y="6309360"/>
             <a:ext cx="10607040" cy="365760"/>
           </a:xfrm>
           <a:prstGeom prst="rect">
@@ -3668,13 +3657,13 @@
           <a:noFill/>
         </p:spPr>
         <p:txBody>
-          <a:bodyPr wrap="square">
-            <a:spAutoFit/>
-          </a:bodyPr>
-          <a:lstStyle/>
-          <a:p>
-            <a:r>
-              <a:rPr sz="1000" b="0">
+          <a:bodyPr wrap="none">
+            <a:spAutoFit/>
+          </a:bodyPr>
+          <a:lstStyle/>
+          <a:p>
+            <a:r>
+              <a:rPr sz="1000">
                 <a:solidFill>
                   <a:srgbClr val="5F6360"/>
                 </a:solidFill>
@@ -3790,7 +3779,7 @@
         <p:spPr>
           <a:xfrm>
             <a:off x="777240" y="1965960"/>
-            <a:ext cx="10607040" cy="4206240"/>
+            <a:ext cx="10607040" cy="1409700"/>
           </a:xfrm>
           <a:prstGeom prst="rect">
             <a:avLst/>
@@ -3803,9 +3792,13 @@
           </a:bodyPr>
           <a:lstStyle/>
           <a:p>
-            <a:pPr algn="l"/>
-            <a:r>
-              <a:rPr b="0" sz="2100">
+            <a:pPr>
+              <a:spcAft>
+                <a:spcPts val="1000"/>
+              </a:spcAft>
+            </a:pPr>
+            <a:r>
+              <a:rPr sz="2100" b="0">
                 <a:solidFill>
                   <a:srgbClr val="1C1C1A"/>
                 </a:solidFill>
@@ -3815,26 +3808,18 @@
             </a:r>
           </a:p>
           <a:p>
-            <a:pPr algn="l"/>
-            <a:r>
-              <a:rPr b="0" sz="2100">
+            <a:pPr>
+              <a:spcAft>
+                <a:spcPts val="1000"/>
+              </a:spcAft>
+            </a:pPr>
+            <a:r>
+              <a:rPr sz="2100" b="0">
                 <a:solidFill>
                   <a:srgbClr val="1C1C1A"/>
                 </a:solidFill>
                 <a:latin typeface="Calibri"/>
               </a:rPr>
-              <a:t> </a:t>
-            </a:r>
-          </a:p>
-          <a:p>
-            <a:pPr algn="l"/>
-            <a:r>
-              <a:rPr b="0" sz="2100">
-                <a:solidFill>
-                  <a:srgbClr val="1C1C1A"/>
-                </a:solidFill>
-                <a:latin typeface="Calibri"/>
-              </a:rPr>
               <a:t>The kernel sees the order you clicked run in. If you ran the third cell first, then the third cell ran first.</a:t>
             </a:r>
           </a:p>
@@ -3848,7 +3833,7 @@
         </p:nvSpPr>
         <p:spPr>
           <a:xfrm>
-            <a:off x="777240" y="6263640"/>
+            <a:off x="777240" y="6309360"/>
             <a:ext cx="10607040" cy="365760"/>
           </a:xfrm>
           <a:prstGeom prst="rect">
@@ -3857,13 +3842,13 @@
           <a:noFill/>
         </p:spPr>
         <p:txBody>
-          <a:bodyPr wrap="square">
-            <a:spAutoFit/>
-          </a:bodyPr>
-          <a:lstStyle/>
-          <a:p>
-            <a:r>
-              <a:rPr sz="1000" b="0">
+          <a:bodyPr wrap="none">
+            <a:spAutoFit/>
+          </a:bodyPr>
+          <a:lstStyle/>
+          <a:p>
+            <a:r>
+              <a:rPr sz="1000">
                 <a:solidFill>
                   <a:srgbClr val="5F6360"/>
                 </a:solidFill>
@@ -3979,7 +3964,7 @@
         <p:spPr>
           <a:xfrm>
             <a:off x="777240" y="1965960"/>
-            <a:ext cx="10607040" cy="4206240"/>
+            <a:ext cx="10607040" cy="542925"/>
           </a:xfrm>
           <a:prstGeom prst="rect">
             <a:avLst/>
@@ -3992,9 +3977,13 @@
           </a:bodyPr>
           <a:lstStyle/>
           <a:p>
-            <a:pPr algn="l"/>
-            <a:r>
-              <a:rPr b="0" sz="2100">
+            <a:pPr>
+              <a:spcAft>
+                <a:spcPts val="1000"/>
+              </a:spcAft>
+            </a:pPr>
+            <a:r>
+              <a:rPr sz="2100" b="0">
                 <a:solidFill>
                   <a:srgbClr val="1C1C1A"/>
                 </a:solidFill>
@@ -4003,75 +3992,113 @@
               <a:t>The number in square brackets to the left of a cell counts the runs the kernel has done.</a:t>
             </a:r>
           </a:p>
-          <a:p>
-            <a:pPr algn="l"/>
-            <a:r>
-              <a:rPr b="0" sz="2100">
+        </p:txBody>
+      </p:sp>
+      <p:sp>
+        <p:nvSpPr>
+          <p:cNvPr id="5" name="TextBox 4"/>
+          <p:cNvSpPr txBox="1"/>
+          <p:nvPr/>
+        </p:nvSpPr>
+        <p:spPr>
+          <a:xfrm>
+            <a:off x="777240" y="2646045"/>
+            <a:ext cx="10607040" cy="914400"/>
+          </a:xfrm>
+          <a:prstGeom prst="rect">
+            <a:avLst/>
+          </a:prstGeom>
+          <a:noFill/>
+        </p:spPr>
+        <p:txBody>
+          <a:bodyPr wrap="square">
+            <a:spAutoFit/>
+          </a:bodyPr>
+          <a:lstStyle/>
+          <a:p>
+            <a:pPr>
+              <a:spcAft>
+                <a:spcPts val="400"/>
+              </a:spcAft>
+            </a:pPr>
+            <a:r>
+              <a:rPr sz="1700" b="0">
+                <a:solidFill>
+                  <a:srgbClr val="2B4A7D"/>
+                </a:solidFill>
+                <a:latin typeface="Consolas"/>
+              </a:rPr>
+              <a:t>[2]  records = [ ... ]</a:t>
+            </a:r>
+          </a:p>
+          <a:p>
+            <a:pPr>
+              <a:spcAft>
+                <a:spcPts val="400"/>
+              </a:spcAft>
+            </a:pPr>
+            <a:r>
+              <a:rPr sz="1700" b="0">
+                <a:solidFill>
+                  <a:srgbClr val="2B4A7D"/>
+                </a:solidFill>
+                <a:latin typeface="Consolas"/>
+              </a:rPr>
+              <a:t>[3]  count = 0</a:t>
+            </a:r>
+          </a:p>
+          <a:p>
+            <a:pPr>
+              <a:spcAft>
+                <a:spcPts val="400"/>
+              </a:spcAft>
+            </a:pPr>
+            <a:r>
+              <a:rPr sz="1700" b="0">
+                <a:solidFill>
+                  <a:srgbClr val="2B4A7D"/>
+                </a:solidFill>
+                <a:latin typeface="Consolas"/>
+              </a:rPr>
+              <a:t>[1]  for r in records:</a:t>
+            </a:r>
+          </a:p>
+        </p:txBody>
+      </p:sp>
+      <p:sp>
+        <p:nvSpPr>
+          <p:cNvPr id="6" name="TextBox 5"/>
+          <p:cNvSpPr txBox="1"/>
+          <p:nvPr/>
+        </p:nvSpPr>
+        <p:spPr>
+          <a:xfrm>
+            <a:off x="777240" y="3697604"/>
+            <a:ext cx="10607040" cy="542925"/>
+          </a:xfrm>
+          <a:prstGeom prst="rect">
+            <a:avLst/>
+          </a:prstGeom>
+          <a:noFill/>
+        </p:spPr>
+        <p:txBody>
+          <a:bodyPr wrap="square">
+            <a:spAutoFit/>
+          </a:bodyPr>
+          <a:lstStyle/>
+          <a:p>
+            <a:pPr>
+              <a:spcAft>
+                <a:spcPts val="1000"/>
+              </a:spcAft>
+            </a:pPr>
+            <a:r>
+              <a:rPr sz="2100" b="0">
                 <a:solidFill>
                   <a:srgbClr val="1C1C1A"/>
                 </a:solidFill>
                 <a:latin typeface="Calibri"/>
               </a:rPr>
-              <a:t> </a:t>
-            </a:r>
-          </a:p>
-          <a:p>
-            <a:pPr algn="l"/>
-            <a:r>
-              <a:rPr sz="1700">
-                <a:solidFill>
-                  <a:srgbClr val="2B4A7D"/>
-                </a:solidFill>
-                <a:latin typeface="Consolas"/>
-              </a:rPr>
-              <a:t>[2]  records = [ ... ]</a:t>
-            </a:r>
-          </a:p>
-          <a:p>
-            <a:pPr algn="l"/>
-            <a:r>
-              <a:rPr sz="1700">
-                <a:solidFill>
-                  <a:srgbClr val="2B4A7D"/>
-                </a:solidFill>
-                <a:latin typeface="Consolas"/>
-              </a:rPr>
-              <a:t>[3]  count = 0</a:t>
-            </a:r>
-          </a:p>
-          <a:p>
-            <a:pPr algn="l"/>
-            <a:r>
-              <a:rPr sz="1700">
-                <a:solidFill>
-                  <a:srgbClr val="2B4A7D"/>
-                </a:solidFill>
-                <a:latin typeface="Consolas"/>
-              </a:rPr>
-              <a:t>[1]  for r in records:</a:t>
-            </a:r>
-          </a:p>
-          <a:p>
-            <a:pPr algn="l"/>
-            <a:r>
-              <a:rPr b="0" sz="2100">
-                <a:solidFill>
-                  <a:srgbClr val="1C1C1A"/>
-                </a:solidFill>
-                <a:latin typeface="Calibri"/>
-              </a:rPr>
-              <a:t> </a:t>
-            </a:r>
-          </a:p>
-          <a:p>
-            <a:pPr algn="l"/>
-            <a:r>
-              <a:rPr b="0" sz="2100">
-                <a:solidFill>
-                  <a:srgbClr val="1C1C1A"/>
-                </a:solidFill>
-                <a:latin typeface="Calibri"/>
-              </a:rPr>
               <a:t>The cell at the bottom of the screen ran first. Read the counters, never the positions.</a:t>
             </a:r>
           </a:p>
@@ -4079,13 +4106,13 @@
       </p:sp>
       <p:sp>
         <p:nvSpPr>
-          <p:cNvPr id="5" name="TextBox 4"/>
-          <p:cNvSpPr txBox="1"/>
-          <p:nvPr/>
-        </p:nvSpPr>
-        <p:spPr>
-          <a:xfrm>
-            <a:off x="777240" y="6263640"/>
+          <p:cNvPr id="7" name="TextBox 6"/>
+          <p:cNvSpPr txBox="1"/>
+          <p:nvPr/>
+        </p:nvSpPr>
+        <p:spPr>
+          <a:xfrm>
+            <a:off x="777240" y="6309360"/>
             <a:ext cx="10607040" cy="365760"/>
           </a:xfrm>
           <a:prstGeom prst="rect">
@@ -4094,13 +4121,13 @@
           <a:noFill/>
         </p:spPr>
         <p:txBody>
-          <a:bodyPr wrap="square">
-            <a:spAutoFit/>
-          </a:bodyPr>
-          <a:lstStyle/>
-          <a:p>
-            <a:r>
-              <a:rPr sz="1000" b="0">
+          <a:bodyPr wrap="none">
+            <a:spAutoFit/>
+          </a:bodyPr>
+          <a:lstStyle/>
+          <a:p>
+            <a:r>
+              <a:rPr sz="1000">
                 <a:solidFill>
                   <a:srgbClr val="5F6360"/>
                 </a:solidFill>
@@ -4216,7 +4243,7 @@
         <p:spPr>
           <a:xfrm>
             <a:off x="777240" y="1965960"/>
-            <a:ext cx="10607040" cy="4206240"/>
+            <a:ext cx="10607040" cy="502920"/>
           </a:xfrm>
           <a:prstGeom prst="rect">
             <a:avLst/>
@@ -4229,9 +4256,13 @@
           </a:bodyPr>
           <a:lstStyle/>
           <a:p>
-            <a:pPr algn="l"/>
-            <a:r>
-              <a:rPr sz="1700">
+            <a:pPr>
+              <a:spcAft>
+                <a:spcPts val="400"/>
+              </a:spcAft>
+            </a:pPr>
+            <a:r>
+              <a:rPr sz="1700" b="0">
                 <a:solidFill>
                   <a:srgbClr val="2B4A7D"/>
                 </a:solidFill>
@@ -4240,69 +4271,58 @@
               <a:t>NameError: name 'records' is not defined</a:t>
             </a:r>
           </a:p>
-          <a:p>
-            <a:pPr algn="l"/>
-            <a:r>
-              <a:rPr b="0" sz="2100">
+        </p:txBody>
+      </p:sp>
+      <p:sp>
+        <p:nvSpPr>
+          <p:cNvPr id="5" name="TextBox 4"/>
+          <p:cNvSpPr txBox="1"/>
+          <p:nvPr/>
+        </p:nvSpPr>
+        <p:spPr>
+          <a:xfrm>
+            <a:off x="777240" y="2606040"/>
+            <a:ext cx="10607040" cy="1162050"/>
+          </a:xfrm>
+          <a:prstGeom prst="rect">
+            <a:avLst/>
+          </a:prstGeom>
+          <a:noFill/>
+        </p:spPr>
+        <p:txBody>
+          <a:bodyPr wrap="square">
+            <a:spAutoFit/>
+          </a:bodyPr>
+          <a:lstStyle/>
+          <a:p>
+            <a:pPr>
+              <a:spcAft>
+                <a:spcPts val="1000"/>
+              </a:spcAft>
+            </a:pPr>
+            <a:r>
+              <a:rPr sz="2100" b="0">
                 <a:solidFill>
                   <a:srgbClr val="1C1C1A"/>
                 </a:solidFill>
                 <a:latin typeface="Calibri"/>
               </a:rPr>
-              <a:t> </a:t>
-            </a:r>
-          </a:p>
-          <a:p>
-            <a:pPr algn="l"/>
-            <a:r>
-              <a:rPr b="0" sz="2100">
+              <a:t>You ran the counting cell before the setup cell, so the name records was never put on the bench and the kernel had nothing to hand your loop.</a:t>
+            </a:r>
+          </a:p>
+          <a:p>
+            <a:pPr>
+              <a:spcAft>
+                <a:spcPts val="1000"/>
+              </a:spcAft>
+            </a:pPr>
+            <a:r>
+              <a:rPr sz="2100" b="0">
                 <a:solidFill>
                   <a:srgbClr val="1C1C1A"/>
                 </a:solidFill>
                 <a:latin typeface="Calibri"/>
               </a:rPr>
-              <a:t>You ran the counting cell before the setup cell, so the name </a:t>
-            </a:r>
-            <a:r>
-              <a:rPr b="0" sz="1800">
-                <a:solidFill>
-                  <a:srgbClr val="2B4A7D"/>
-                </a:solidFill>
-                <a:latin typeface="Consolas"/>
-              </a:rPr>
-              <a:t>records</a:t>
-            </a:r>
-            <a:r>
-              <a:rPr b="0" sz="2100">
-                <a:solidFill>
-                  <a:srgbClr val="1C1C1A"/>
-                </a:solidFill>
-                <a:latin typeface="Calibri"/>
-              </a:rPr>
-              <a:t> was never put on the bench and the kernel had nothing to hand your loop.</a:t>
-            </a:r>
-          </a:p>
-          <a:p>
-            <a:pPr algn="l"/>
-            <a:r>
-              <a:rPr b="0" sz="2100">
-                <a:solidFill>
-                  <a:srgbClr val="1C1C1A"/>
-                </a:solidFill>
-                <a:latin typeface="Calibri"/>
-              </a:rPr>
-              <a:t> </a:t>
-            </a:r>
-          </a:p>
-          <a:p>
-            <a:pPr algn="l"/>
-            <a:r>
-              <a:rPr b="0" sz="2100">
-                <a:solidFill>
-                  <a:srgbClr val="1C1C1A"/>
-                </a:solidFill>
-                <a:latin typeface="Calibri"/>
-              </a:rPr>
               <a:t>The error names the exact word it went looking for.</a:t>
             </a:r>
           </a:p>
@@ -4310,13 +4330,13 @@
       </p:sp>
       <p:sp>
         <p:nvSpPr>
-          <p:cNvPr id="5" name="TextBox 4"/>
-          <p:cNvSpPr txBox="1"/>
-          <p:nvPr/>
-        </p:nvSpPr>
-        <p:spPr>
-          <a:xfrm>
-            <a:off x="777240" y="6263640"/>
+          <p:cNvPr id="6" name="TextBox 5"/>
+          <p:cNvSpPr txBox="1"/>
+          <p:nvPr/>
+        </p:nvSpPr>
+        <p:spPr>
+          <a:xfrm>
+            <a:off x="777240" y="6309360"/>
             <a:ext cx="10607040" cy="365760"/>
           </a:xfrm>
           <a:prstGeom prst="rect">
@@ -4325,13 +4345,13 @@
           <a:noFill/>
         </p:spPr>
         <p:txBody>
-          <a:bodyPr wrap="square">
-            <a:spAutoFit/>
-          </a:bodyPr>
-          <a:lstStyle/>
-          <a:p>
-            <a:r>
-              <a:rPr sz="1000" b="0">
+          <a:bodyPr wrap="none">
+            <a:spAutoFit/>
+          </a:bodyPr>
+          <a:lstStyle/>
+          <a:p>
+            <a:r>
+              <a:rPr sz="1000">
                 <a:solidFill>
                   <a:srgbClr val="5F6360"/>
                 </a:solidFill>
@@ -4447,7 +4467,7 @@
         <p:spPr>
           <a:xfrm>
             <a:off x="777240" y="1965960"/>
-            <a:ext cx="10607040" cy="4206240"/>
+            <a:ext cx="10607040" cy="1781175"/>
           </a:xfrm>
           <a:prstGeom prst="rect">
             <a:avLst/>
@@ -4460,9 +4480,13 @@
           </a:bodyPr>
           <a:lstStyle/>
           <a:p>
-            <a:pPr algn="l"/>
-            <a:r>
-              <a:rPr b="0" sz="2100">
+            <a:pPr>
+              <a:spcAft>
+                <a:spcPts val="1000"/>
+              </a:spcAft>
+            </a:pPr>
+            <a:r>
+              <a:rPr sz="2100" b="0">
                 <a:solidFill>
                   <a:srgbClr val="1C1C1A"/>
                 </a:solidFill>
@@ -4472,50 +4496,34 @@
             </a:r>
           </a:p>
           <a:p>
-            <a:pPr algn="l"/>
-            <a:r>
-              <a:rPr b="0" sz="2100">
+            <a:pPr>
+              <a:spcAft>
+                <a:spcPts val="1000"/>
+              </a:spcAft>
+            </a:pPr>
+            <a:r>
+              <a:rPr sz="2100" b="0">
                 <a:solidFill>
                   <a:srgbClr val="1C1C1A"/>
                 </a:solidFill>
                 <a:latin typeface="Calibri"/>
               </a:rPr>
-              <a:t> </a:t>
-            </a:r>
-          </a:p>
-          <a:p>
-            <a:pPr algn="l"/>
-            <a:r>
-              <a:rPr b="0" sz="2100">
+              <a:t>The file on disk never changed. What you lost was the state on the bench, and the cells put that state straight back.</a:t>
+            </a:r>
+          </a:p>
+          <a:p>
+            <a:pPr>
+              <a:spcAft>
+                <a:spcPts val="1000"/>
+              </a:spcAft>
+            </a:pPr>
+            <a:r>
+              <a:rPr sz="2100" b="0">
                 <a:solidFill>
                   <a:srgbClr val="1C1C1A"/>
                 </a:solidFill>
                 <a:latin typeface="Calibri"/>
               </a:rPr>
-              <a:t>The file on disk never changed. What you lost was the state on the bench, and the cells put that state straight back.</a:t>
-            </a:r>
-          </a:p>
-          <a:p>
-            <a:pPr algn="l"/>
-            <a:r>
-              <a:rPr b="0" sz="2100">
-                <a:solidFill>
-                  <a:srgbClr val="1C1C1A"/>
-                </a:solidFill>
-                <a:latin typeface="Calibri"/>
-              </a:rPr>
-              <a:t> </a:t>
-            </a:r>
-          </a:p>
-          <a:p>
-            <a:pPr algn="l"/>
-            <a:r>
-              <a:rPr b="0" sz="2100">
-                <a:solidFill>
-                  <a:srgbClr val="1C1C1A"/>
-                </a:solidFill>
-                <a:latin typeface="Calibri"/>
-              </a:rPr>
               <a:t>Do the drill now on purpose, because you will do it many times this week.</a:t>
             </a:r>
           </a:p>
@@ -4529,7 +4537,7 @@
         </p:nvSpPr>
         <p:spPr>
           <a:xfrm>
-            <a:off x="777240" y="6263640"/>
+            <a:off x="777240" y="6309360"/>
             <a:ext cx="10607040" cy="365760"/>
           </a:xfrm>
           <a:prstGeom prst="rect">
@@ -4538,13 +4546,13 @@
           <a:noFill/>
         </p:spPr>
         <p:txBody>
-          <a:bodyPr wrap="square">
-            <a:spAutoFit/>
-          </a:bodyPr>
-          <a:lstStyle/>
-          <a:p>
-            <a:r>
-              <a:rPr sz="1000" b="0">
+          <a:bodyPr wrap="none">
+            <a:spAutoFit/>
+          </a:bodyPr>
+          <a:lstStyle/>
+          <a:p>
+            <a:r>
+              <a:rPr sz="1000">
                 <a:solidFill>
                   <a:srgbClr val="5F6360"/>
                 </a:solidFill>
@@ -4660,7 +4668,7 @@
         <p:spPr>
           <a:xfrm>
             <a:off x="777240" y="1965960"/>
-            <a:ext cx="10607040" cy="4206240"/>
+            <a:ext cx="10607040" cy="1657350"/>
           </a:xfrm>
           <a:prstGeom prst="rect">
             <a:avLst/>
@@ -4673,9 +4681,13 @@
           </a:bodyPr>
           <a:lstStyle/>
           <a:p>
-            <a:pPr algn="l"/>
-            <a:r>
-              <a:rPr b="0" sz="2100">
+            <a:pPr>
+              <a:spcAft>
+                <a:spcPts val="1000"/>
+              </a:spcAft>
+            </a:pPr>
+            <a:r>
+              <a:rPr sz="2100" b="0">
                 <a:solidFill>
                   <a:srgbClr val="1C1C1A"/>
                 </a:solidFill>
@@ -4685,9 +4697,13 @@
             </a:r>
           </a:p>
           <a:p>
-            <a:pPr algn="l"/>
-            <a:r>
-              <a:rPr b="0" sz="2100">
+            <a:pPr>
+              <a:spcAft>
+                <a:spcPts val="1000"/>
+              </a:spcAft>
+            </a:pPr>
+            <a:r>
+              <a:rPr sz="2100" b="0">
                 <a:solidFill>
                   <a:srgbClr val="1C1C1A"/>
                 </a:solidFill>
@@ -4697,9 +4713,13 @@
             </a:r>
           </a:p>
           <a:p>
-            <a:pPr algn="l"/>
-            <a:r>
-              <a:rPr b="0" sz="2100">
+            <a:pPr>
+              <a:spcAft>
+                <a:spcPts val="1000"/>
+              </a:spcAft>
+            </a:pPr>
+            <a:r>
+              <a:rPr sz="2100" b="0">
                 <a:solidFill>
                   <a:srgbClr val="1C1C1A"/>
                 </a:solidFill>
@@ -4709,9 +4729,13 @@
             </a:r>
           </a:p>
           <a:p>
-            <a:pPr algn="l"/>
-            <a:r>
-              <a:rPr b="0" sz="2100">
+            <a:pPr>
+              <a:spcAft>
+                <a:spcPts val="1000"/>
+              </a:spcAft>
+            </a:pPr>
+            <a:r>
+              <a:rPr sz="2100" b="0">
                 <a:solidFill>
                   <a:srgbClr val="1C1C1A"/>
                 </a:solidFill>
@@ -4730,7 +4754,7 @@
         </p:nvSpPr>
         <p:spPr>
           <a:xfrm>
-            <a:off x="777240" y="6263640"/>
+            <a:off x="777240" y="6309360"/>
             <a:ext cx="10607040" cy="365760"/>
           </a:xfrm>
           <a:prstGeom prst="rect">
@@ -4739,13 +4763,13 @@
           <a:noFill/>
         </p:spPr>
         <p:txBody>
-          <a:bodyPr wrap="square">
-            <a:spAutoFit/>
-          </a:bodyPr>
-          <a:lstStyle/>
-          <a:p>
-            <a:r>
-              <a:rPr sz="1000" b="0">
+          <a:bodyPr wrap="none">
+            <a:spAutoFit/>
+          </a:bodyPr>
+          <a:lstStyle/>
+          <a:p>
+            <a:r>
+              <a:rPr sz="1000">
                 <a:solidFill>
                   <a:srgbClr val="5F6360"/>
                 </a:solidFill>
@@ -4840,6 +4864,7 @@
           </a:bodyPr>
           <a:lstStyle/>
           <a:p>
+            <a:pPr algn="ctr"/>
             <a:r>
               <a:rPr sz="3600" b="1">
                 <a:solidFill>
@@ -4861,7 +4886,7 @@
         <p:spPr>
           <a:xfrm>
             <a:off x="777240" y="1965960"/>
-            <a:ext cx="10607040" cy="4206240"/>
+            <a:ext cx="10607040" cy="790575"/>
           </a:xfrm>
           <a:prstGeom prst="rect">
             <a:avLst/>
@@ -4874,31 +4899,35 @@
           </a:bodyPr>
           <a:lstStyle/>
           <a:p>
-            <a:pPr algn="l"/>
-            <a:r>
-              <a:rPr b="0" sz="1800">
+            <a:pPr algn="ctr">
+              <a:spcAft>
+                <a:spcPts val="1000"/>
+              </a:spcAft>
+            </a:pPr>
+            <a:r>
+              <a:rPr sz="2100" b="0">
                 <a:solidFill>
                   <a:srgbClr val="FFFFFF"/>
                 </a:solidFill>
-                <a:latin typeface="Consolas"/>
+                <a:latin typeface="Calibri"/>
               </a:rPr>
               <a:t>[open the workbench] &gt; [the kernel remembers] &gt; </a:t>
             </a:r>
             <a:r>
-              <a:rPr b="1" sz="1800">
+              <a:rPr sz="2100" b="1">
                 <a:solidFill>
                   <a:srgbClr val="FFFFFF"/>
                 </a:solidFill>
-                <a:latin typeface="Consolas"/>
+                <a:latin typeface="Calibri"/>
               </a:rPr>
               <a:t>[type decides]</a:t>
             </a:r>
             <a:r>
-              <a:rPr b="0" sz="1800">
+              <a:rPr sz="2100" b="0">
                 <a:solidFill>
                   <a:srgbClr val="FFFFFF"/>
                 </a:solidFill>
-                <a:latin typeface="Consolas"/>
+                <a:latin typeface="Calibri"/>
               </a:rPr>
               <a:t> &gt; [walk the records] &gt; [the business answer]</a:t>
             </a:r>
@@ -4913,7 +4942,7 @@
         </p:nvSpPr>
         <p:spPr>
           <a:xfrm>
-            <a:off x="777240" y="6263640"/>
+            <a:off x="777240" y="6309360"/>
             <a:ext cx="10607040" cy="365760"/>
           </a:xfrm>
           <a:prstGeom prst="rect">
@@ -4922,13 +4951,13 @@
           <a:noFill/>
         </p:spPr>
         <p:txBody>
-          <a:bodyPr wrap="square">
-            <a:spAutoFit/>
-          </a:bodyPr>
-          <a:lstStyle/>
-          <a:p>
-            <a:r>
-              <a:rPr sz="1000" b="0">
+          <a:bodyPr wrap="none">
+            <a:spAutoFit/>
+          </a:bodyPr>
+          <a:lstStyle/>
+          <a:p>
+            <a:r>
+              <a:rPr sz="1000">
                 <a:solidFill>
                   <a:srgbClr val="5F6360"/>
                 </a:solidFill>
@@ -5044,7 +5073,7 @@
         <p:spPr>
           <a:xfrm>
             <a:off x="777240" y="1965960"/>
-            <a:ext cx="10607040" cy="4206240"/>
+            <a:ext cx="10607040" cy="1657350"/>
           </a:xfrm>
           <a:prstGeom prst="rect">
             <a:avLst/>
@@ -5057,159 +5086,67 @@
           </a:bodyPr>
           <a:lstStyle/>
           <a:p>
-            <a:pPr algn="l"/>
-            <a:r>
-              <a:rPr b="0" sz="1800">
-                <a:solidFill>
-                  <a:srgbClr val="2B4A7D"/>
-                </a:solidFill>
-                <a:latin typeface="Consolas"/>
-              </a:rPr>
-              <a:t>str</a:t>
-            </a:r>
-            <a:r>
-              <a:rPr b="0" sz="2100">
+            <a:pPr>
+              <a:spcAft>
+                <a:spcPts val="1000"/>
+              </a:spcAft>
+            </a:pPr>
+            <a:r>
+              <a:rPr sz="2100" b="0">
                 <a:solidFill>
                   <a:srgbClr val="1C1C1A"/>
                 </a:solidFill>
                 <a:latin typeface="Calibri"/>
               </a:rPr>
-              <a:t> holds text, like the order id "KR4224" and the status "delivered".</a:t>
-            </a:r>
-          </a:p>
-          <a:p>
-            <a:pPr algn="l"/>
-            <a:r>
-              <a:rPr b="0" sz="2100">
+              <a:t>str holds text, like the order id "KR4224" and the status "delivered".</a:t>
+            </a:r>
+          </a:p>
+          <a:p>
+            <a:pPr>
+              <a:spcAft>
+                <a:spcPts val="1000"/>
+              </a:spcAft>
+            </a:pPr>
+            <a:r>
+              <a:rPr sz="2100" b="0">
                 <a:solidFill>
                   <a:srgbClr val="1C1C1A"/>
                 </a:solidFill>
                 <a:latin typeface="Calibri"/>
               </a:rPr>
-              <a:t> </a:t>
-            </a:r>
-          </a:p>
-          <a:p>
-            <a:pPr algn="l"/>
-            <a:r>
-              <a:rPr b="0" sz="1800">
-                <a:solidFill>
-                  <a:srgbClr val="2B4A7D"/>
-                </a:solidFill>
-                <a:latin typeface="Consolas"/>
-              </a:rPr>
-              <a:t>int</a:t>
-            </a:r>
-            <a:r>
-              <a:rPr b="0" sz="2100">
+              <a:t>int holds a whole number, like the amount 1460.</a:t>
+            </a:r>
+          </a:p>
+          <a:p>
+            <a:pPr>
+              <a:spcAft>
+                <a:spcPts val="1000"/>
+              </a:spcAft>
+            </a:pPr>
+            <a:r>
+              <a:rPr sz="2100" b="0">
                 <a:solidFill>
                   <a:srgbClr val="1C1C1A"/>
                 </a:solidFill>
                 <a:latin typeface="Calibri"/>
               </a:rPr>
-              <a:t> holds a whole number, like the amount 1460.</a:t>
-            </a:r>
-          </a:p>
-          <a:p>
-            <a:pPr algn="l"/>
-            <a:r>
-              <a:rPr b="0" sz="2100">
+              <a:t>float holds a number with a decimal part, like 1460.5.</a:t>
+            </a:r>
+          </a:p>
+          <a:p>
+            <a:pPr>
+              <a:spcAft>
+                <a:spcPts val="1000"/>
+              </a:spcAft>
+            </a:pPr>
+            <a:r>
+              <a:rPr sz="2100" b="0">
                 <a:solidFill>
                   <a:srgbClr val="1C1C1A"/>
                 </a:solidFill>
                 <a:latin typeface="Calibri"/>
               </a:rPr>
-              <a:t> </a:t>
-            </a:r>
-          </a:p>
-          <a:p>
-            <a:pPr algn="l"/>
-            <a:r>
-              <a:rPr b="0" sz="1800">
-                <a:solidFill>
-                  <a:srgbClr val="2B4A7D"/>
-                </a:solidFill>
-                <a:latin typeface="Consolas"/>
-              </a:rPr>
-              <a:t>float</a:t>
-            </a:r>
-            <a:r>
-              <a:rPr b="0" sz="2100">
-                <a:solidFill>
-                  <a:srgbClr val="1C1C1A"/>
-                </a:solidFill>
-                <a:latin typeface="Calibri"/>
-              </a:rPr>
-              <a:t> holds a number with a decimal part, like 1460.5.</a:t>
-            </a:r>
-          </a:p>
-          <a:p>
-            <a:pPr algn="l"/>
-            <a:r>
-              <a:rPr b="0" sz="2100">
-                <a:solidFill>
-                  <a:srgbClr val="1C1C1A"/>
-                </a:solidFill>
-                <a:latin typeface="Calibri"/>
-              </a:rPr>
-              <a:t> </a:t>
-            </a:r>
-          </a:p>
-          <a:p>
-            <a:pPr algn="l"/>
-            <a:r>
-              <a:rPr b="0" sz="1800">
-                <a:solidFill>
-                  <a:srgbClr val="2B4A7D"/>
-                </a:solidFill>
-                <a:latin typeface="Consolas"/>
-              </a:rPr>
-              <a:t>bool</a:t>
-            </a:r>
-            <a:r>
-              <a:rPr b="0" sz="2100">
-                <a:solidFill>
-                  <a:srgbClr val="1C1C1A"/>
-                </a:solidFill>
-                <a:latin typeface="Calibri"/>
-              </a:rPr>
-              <a:t> holds </a:t>
-            </a:r>
-            <a:r>
-              <a:rPr b="0" sz="1800">
-                <a:solidFill>
-                  <a:srgbClr val="2B4A7D"/>
-                </a:solidFill>
-                <a:latin typeface="Consolas"/>
-              </a:rPr>
-              <a:t>True</a:t>
-            </a:r>
-            <a:r>
-              <a:rPr b="0" sz="2100">
-                <a:solidFill>
-                  <a:srgbClr val="1C1C1A"/>
-                </a:solidFill>
-                <a:latin typeface="Calibri"/>
-              </a:rPr>
-              <a:t> or </a:t>
-            </a:r>
-            <a:r>
-              <a:rPr b="0" sz="1800">
-                <a:solidFill>
-                  <a:srgbClr val="2B4A7D"/>
-                </a:solidFill>
-                <a:latin typeface="Consolas"/>
-              </a:rPr>
-              <a:t>False</a:t>
-            </a:r>
-            <a:r>
-              <a:rPr b="0" sz="2100">
-                <a:solidFill>
-                  <a:srgbClr val="1C1C1A"/>
-                </a:solidFill>
-                <a:latin typeface="Calibri"/>
-              </a:rPr>
-              <a:t>, which is what every comparison hands back.</a:t>
+              <a:t>bool holds True or False, which is what every comparison hands back.</a:t>
             </a:r>
           </a:p>
         </p:txBody>
@@ -5222,7 +5159,7 @@
         </p:nvSpPr>
         <p:spPr>
           <a:xfrm>
-            <a:off x="777240" y="6263640"/>
+            <a:off x="777240" y="6309360"/>
             <a:ext cx="10607040" cy="365760"/>
           </a:xfrm>
           <a:prstGeom prst="rect">
@@ -5231,13 +5168,13 @@
           <a:noFill/>
         </p:spPr>
         <p:txBody>
-          <a:bodyPr wrap="square">
-            <a:spAutoFit/>
-          </a:bodyPr>
-          <a:lstStyle/>
-          <a:p>
-            <a:r>
-              <a:rPr sz="1000" b="0">
+          <a:bodyPr wrap="none">
+            <a:spAutoFit/>
+          </a:bodyPr>
+          <a:lstStyle/>
+          <a:p>
+            <a:r>
+              <a:rPr sz="1000">
                 <a:solidFill>
                   <a:srgbClr val="5F6360"/>
                 </a:solidFill>
@@ -5353,7 +5290,7 @@
         <p:spPr>
           <a:xfrm>
             <a:off x="777240" y="1965960"/>
-            <a:ext cx="10607040" cy="4206240"/>
+            <a:ext cx="10607040" cy="1162050"/>
           </a:xfrm>
           <a:prstGeom prst="rect">
             <a:avLst/>
@@ -5366,9 +5303,13 @@
           </a:bodyPr>
           <a:lstStyle/>
           <a:p>
-            <a:pPr algn="l"/>
-            <a:r>
-              <a:rPr sz="1700">
+            <a:pPr>
+              <a:spcAft>
+                <a:spcPts val="400"/>
+              </a:spcAft>
+            </a:pPr>
+            <a:r>
+              <a:rPr sz="1700" b="0">
                 <a:solidFill>
                   <a:srgbClr val="2B4A7D"/>
                 </a:solidFill>
@@ -5378,9 +5319,13 @@
             </a:r>
           </a:p>
           <a:p>
-            <a:pPr algn="l"/>
-            <a:r>
-              <a:rPr sz="1700">
+            <a:pPr>
+              <a:spcAft>
+                <a:spcPts val="400"/>
+              </a:spcAft>
+            </a:pPr>
+            <a:r>
+              <a:rPr sz="1700" b="0">
                 <a:solidFill>
                   <a:srgbClr val="2B4A7D"/>
                 </a:solidFill>
@@ -5390,9 +5335,13 @@
             </a:r>
           </a:p>
           <a:p>
-            <a:pPr algn="l"/>
-            <a:r>
-              <a:rPr sz="1700">
+            <a:pPr>
+              <a:spcAft>
+                <a:spcPts val="400"/>
+              </a:spcAft>
+            </a:pPr>
+            <a:r>
+              <a:rPr sz="1700" b="0">
                 <a:solidFill>
                   <a:srgbClr val="2B4A7D"/>
                 </a:solidFill>
@@ -5402,9 +5351,13 @@
             </a:r>
           </a:p>
           <a:p>
-            <a:pPr algn="l"/>
-            <a:r>
-              <a:rPr sz="1700">
+            <a:pPr>
+              <a:spcAft>
+                <a:spcPts val="400"/>
+              </a:spcAft>
+            </a:pPr>
+            <a:r>
+              <a:rPr sz="1700" b="0">
                 <a:solidFill>
                   <a:srgbClr val="2B4A7D"/>
                 </a:solidFill>
@@ -5413,27 +5366,42 @@
               <a:t>type(4500 &gt; 2000)   &lt;class 'bool'&gt;</a:t>
             </a:r>
           </a:p>
-          <a:p>
-            <a:pPr algn="l"/>
-            <a:r>
-              <a:rPr b="0" sz="2100">
+        </p:txBody>
+      </p:sp>
+      <p:sp>
+        <p:nvSpPr>
+          <p:cNvPr id="5" name="TextBox 4"/>
+          <p:cNvSpPr txBox="1"/>
+          <p:nvPr/>
+        </p:nvSpPr>
+        <p:spPr>
+          <a:xfrm>
+            <a:off x="777240" y="3265169"/>
+            <a:ext cx="10607040" cy="790575"/>
+          </a:xfrm>
+          <a:prstGeom prst="rect">
+            <a:avLst/>
+          </a:prstGeom>
+          <a:noFill/>
+        </p:spPr>
+        <p:txBody>
+          <a:bodyPr wrap="square">
+            <a:spAutoFit/>
+          </a:bodyPr>
+          <a:lstStyle/>
+          <a:p>
+            <a:pPr>
+              <a:spcAft>
+                <a:spcPts val="1000"/>
+              </a:spcAft>
+            </a:pPr>
+            <a:r>
+              <a:rPr sz="2100" b="0">
                 <a:solidFill>
                   <a:srgbClr val="1C1C1A"/>
                 </a:solidFill>
                 <a:latin typeface="Calibri"/>
               </a:rPr>
-              <a:t> </a:t>
-            </a:r>
-          </a:p>
-          <a:p>
-            <a:pPr algn="l"/>
-            <a:r>
-              <a:rPr b="0" sz="2100">
-                <a:solidFill>
-                  <a:srgbClr val="1C1C1A"/>
-                </a:solidFill>
-                <a:latin typeface="Calibri"/>
-              </a:rPr>
               <a:t>When an operator behaves in a way you did not expect, ask the value what it is before you change any code.</a:t>
             </a:r>
           </a:p>
@@ -5441,13 +5409,13 @@
       </p:sp>
       <p:sp>
         <p:nvSpPr>
-          <p:cNvPr id="5" name="TextBox 4"/>
-          <p:cNvSpPr txBox="1"/>
-          <p:nvPr/>
-        </p:nvSpPr>
-        <p:spPr>
-          <a:xfrm>
-            <a:off x="777240" y="6263640"/>
+          <p:cNvPr id="6" name="TextBox 5"/>
+          <p:cNvSpPr txBox="1"/>
+          <p:nvPr/>
+        </p:nvSpPr>
+        <p:spPr>
+          <a:xfrm>
+            <a:off x="777240" y="6309360"/>
             <a:ext cx="10607040" cy="365760"/>
           </a:xfrm>
           <a:prstGeom prst="rect">
@@ -5456,13 +5424,13 @@
           <a:noFill/>
         </p:spPr>
         <p:txBody>
-          <a:bodyPr wrap="square">
-            <a:spAutoFit/>
-          </a:bodyPr>
-          <a:lstStyle/>
-          <a:p>
-            <a:r>
-              <a:rPr sz="1000" b="0">
+          <a:bodyPr wrap="none">
+            <a:spAutoFit/>
+          </a:bodyPr>
+          <a:lstStyle/>
+          <a:p>
+            <a:r>
+              <a:rPr sz="1000">
                 <a:solidFill>
                   <a:srgbClr val="5F6360"/>
                 </a:solidFill>
@@ -5578,7 +5546,7 @@
         <p:spPr>
           <a:xfrm>
             <a:off x="777240" y="1965960"/>
-            <a:ext cx="10607040" cy="4206240"/>
+            <a:ext cx="10607040" cy="1409700"/>
           </a:xfrm>
           <a:prstGeom prst="rect">
             <a:avLst/>
@@ -5591,38 +5559,34 @@
           </a:bodyPr>
           <a:lstStyle/>
           <a:p>
-            <a:pPr algn="l"/>
-            <a:r>
-              <a:rPr b="0" sz="1800">
-                <a:solidFill>
-                  <a:srgbClr val="2B4A7D"/>
-                </a:solidFill>
-                <a:latin typeface="Consolas"/>
+            <a:pPr>
+              <a:spcAft>
+                <a:spcPts val="1000"/>
+              </a:spcAft>
+            </a:pPr>
+            <a:r>
+              <a:rPr sz="2100" b="0">
+                <a:solidFill>
+                  <a:srgbClr val="1C1C1A"/>
+                </a:solidFill>
+                <a:latin typeface="Calibri"/>
               </a:rPr>
               <a:t>[open the workbench] &gt; [the kernel remembers] &gt; [type decides] &gt; [walk the records] &gt; [the business answer]</a:t>
             </a:r>
           </a:p>
           <a:p>
-            <a:pPr algn="l"/>
-            <a:r>
-              <a:rPr b="0" sz="2100">
+            <a:pPr>
+              <a:spcAft>
+                <a:spcPts val="1000"/>
+              </a:spcAft>
+            </a:pPr>
+            <a:r>
+              <a:rPr sz="2100" b="0">
                 <a:solidFill>
                   <a:srgbClr val="1C1C1A"/>
                 </a:solidFill>
                 <a:latin typeface="Calibri"/>
               </a:rPr>
-              <a:t> </a:t>
-            </a:r>
-          </a:p>
-          <a:p>
-            <a:pPr algn="l"/>
-            <a:r>
-              <a:rPr b="0" sz="2100">
-                <a:solidFill>
-                  <a:srgbClr val="1C1C1A"/>
-                </a:solidFill>
-                <a:latin typeface="Calibri"/>
-              </a:rPr>
               <a:t>Every order in this file is a Kalpa Retail order. The same thirty orders come back tomorrow as a file, and they come back again in Week 2 in pandas and in SQL.</a:t>
             </a:r>
           </a:p>
@@ -5636,7 +5600,7 @@
         </p:nvSpPr>
         <p:spPr>
           <a:xfrm>
-            <a:off x="777240" y="6263640"/>
+            <a:off x="777240" y="6309360"/>
             <a:ext cx="10607040" cy="365760"/>
           </a:xfrm>
           <a:prstGeom prst="rect">
@@ -5645,13 +5609,13 @@
           <a:noFill/>
         </p:spPr>
         <p:txBody>
-          <a:bodyPr wrap="square">
-            <a:spAutoFit/>
-          </a:bodyPr>
-          <a:lstStyle/>
-          <a:p>
-            <a:r>
-              <a:rPr sz="1000" b="0">
+          <a:bodyPr wrap="none">
+            <a:spAutoFit/>
+          </a:bodyPr>
+          <a:lstStyle/>
+          <a:p>
+            <a:r>
+              <a:rPr sz="1000">
                 <a:solidFill>
                   <a:srgbClr val="5F6360"/>
                 </a:solidFill>
@@ -5767,7 +5731,7 @@
         <p:spPr>
           <a:xfrm>
             <a:off x="777240" y="1965960"/>
-            <a:ext cx="10607040" cy="4206240"/>
+            <a:ext cx="10607040" cy="1066800"/>
           </a:xfrm>
           <a:prstGeom prst="rect">
             <a:avLst/>
@@ -5780,9 +5744,13 @@
           </a:bodyPr>
           <a:lstStyle/>
           <a:p>
-            <a:pPr algn="l"/>
-            <a:r>
-              <a:rPr sz="1700">
+            <a:pPr>
+              <a:spcAft>
+                <a:spcPts val="400"/>
+              </a:spcAft>
+            </a:pPr>
+            <a:r>
+              <a:rPr sz="1700" b="0">
                 <a:solidFill>
                   <a:srgbClr val="2B4A7D"/>
                 </a:solidFill>
@@ -5792,9 +5760,13 @@
             </a:r>
           </a:p>
           <a:p>
-            <a:pPr algn="l"/>
-            <a:r>
-              <a:rPr sz="1700">
+            <a:pPr>
+              <a:spcAft>
+                <a:spcPts val="400"/>
+              </a:spcAft>
+            </a:pPr>
+            <a:r>
+              <a:rPr sz="1700" b="0">
                 <a:solidFill>
                   <a:srgbClr val="2B4A7D"/>
                 </a:solidFill>
@@ -5803,51 +5775,58 @@
               <a:t>{"order_id": "KR4201", "segment": "Retail-Plus", "amount": 2395, "status": "delivered", "order_date": "2026-08-03"}</a:t>
             </a:r>
           </a:p>
-          <a:p>
-            <a:pPr algn="l"/>
-            <a:r>
-              <a:rPr b="0" sz="2100">
+        </p:txBody>
+      </p:sp>
+      <p:sp>
+        <p:nvSpPr>
+          <p:cNvPr id="5" name="TextBox 4"/>
+          <p:cNvSpPr txBox="1"/>
+          <p:nvPr/>
+        </p:nvSpPr>
+        <p:spPr>
+          <a:xfrm>
+            <a:off x="777240" y="3169920"/>
+            <a:ext cx="10607040" cy="914400"/>
+          </a:xfrm>
+          <a:prstGeom prst="rect">
+            <a:avLst/>
+          </a:prstGeom>
+          <a:noFill/>
+        </p:spPr>
+        <p:txBody>
+          <a:bodyPr wrap="square">
+            <a:spAutoFit/>
+          </a:bodyPr>
+          <a:lstStyle/>
+          <a:p>
+            <a:pPr>
+              <a:spcAft>
+                <a:spcPts val="1000"/>
+              </a:spcAft>
+            </a:pPr>
+            <a:r>
+              <a:rPr sz="2100" b="0">
                 <a:solidFill>
                   <a:srgbClr val="1C1C1A"/>
                 </a:solidFill>
                 <a:latin typeface="Calibri"/>
               </a:rPr>
-              <a:t> </a:t>
-            </a:r>
-          </a:p>
-          <a:p>
-            <a:pPr algn="l"/>
-            <a:r>
-              <a:rPr b="0" sz="2100">
+              <a:t>One of those two amounts is wearing quotes. Read the two lines again and find it.</a:t>
+            </a:r>
+          </a:p>
+          <a:p>
+            <a:pPr>
+              <a:spcAft>
+                <a:spcPts val="1000"/>
+              </a:spcAft>
+            </a:pPr>
+            <a:r>
+              <a:rPr sz="2100" b="0">
                 <a:solidFill>
                   <a:srgbClr val="1C1C1A"/>
                 </a:solidFill>
                 <a:latin typeface="Calibri"/>
               </a:rPr>
-              <a:t>One of those two amounts is wearing quotes. Read the two lines again and find it.</a:t>
-            </a:r>
-          </a:p>
-          <a:p>
-            <a:pPr algn="l"/>
-            <a:r>
-              <a:rPr b="0" sz="2100">
-                <a:solidFill>
-                  <a:srgbClr val="1C1C1A"/>
-                </a:solidFill>
-                <a:latin typeface="Calibri"/>
-              </a:rPr>
-              <a:t> </a:t>
-            </a:r>
-          </a:p>
-          <a:p>
-            <a:pPr algn="l"/>
-            <a:r>
-              <a:rPr b="0" sz="2100">
-                <a:solidFill>
-                  <a:srgbClr val="1C1C1A"/>
-                </a:solidFill>
-                <a:latin typeface="Calibri"/>
-              </a:rPr>
               <a:t>KR4200 stores its amount as the text "4500", and it is the largest amount in the file.</a:t>
             </a:r>
           </a:p>
@@ -5855,13 +5834,13 @@
       </p:sp>
       <p:sp>
         <p:nvSpPr>
-          <p:cNvPr id="5" name="TextBox 4"/>
-          <p:cNvSpPr txBox="1"/>
-          <p:nvPr/>
-        </p:nvSpPr>
-        <p:spPr>
-          <a:xfrm>
-            <a:off x="777240" y="6263640"/>
+          <p:cNvPr id="6" name="TextBox 5"/>
+          <p:cNvSpPr txBox="1"/>
+          <p:nvPr/>
+        </p:nvSpPr>
+        <p:spPr>
+          <a:xfrm>
+            <a:off x="777240" y="6309360"/>
             <a:ext cx="10607040" cy="365760"/>
           </a:xfrm>
           <a:prstGeom prst="rect">
@@ -5870,13 +5849,13 @@
           <a:noFill/>
         </p:spPr>
         <p:txBody>
-          <a:bodyPr wrap="square">
-            <a:spAutoFit/>
-          </a:bodyPr>
-          <a:lstStyle/>
-          <a:p>
-            <a:r>
-              <a:rPr sz="1000" b="0">
+          <a:bodyPr wrap="none">
+            <a:spAutoFit/>
+          </a:bodyPr>
+          <a:lstStyle/>
+          <a:p>
+            <a:r>
+              <a:rPr sz="1000">
                 <a:solidFill>
                   <a:srgbClr val="5F6360"/>
                 </a:solidFill>
@@ -5992,7 +5971,7 @@
         <p:spPr>
           <a:xfrm>
             <a:off x="777240" y="1965960"/>
-            <a:ext cx="10607040" cy="4206240"/>
+            <a:ext cx="10607040" cy="666750"/>
           </a:xfrm>
           <a:prstGeom prst="rect">
             <a:avLst/>
@@ -6005,9 +5984,13 @@
           </a:bodyPr>
           <a:lstStyle/>
           <a:p>
-            <a:pPr algn="l"/>
-            <a:r>
-              <a:rPr sz="1700">
+            <a:pPr>
+              <a:spcAft>
+                <a:spcPts val="400"/>
+              </a:spcAft>
+            </a:pPr>
+            <a:r>
+              <a:rPr sz="1700" b="0">
                 <a:solidFill>
                   <a:srgbClr val="2B4A7D"/>
                 </a:solidFill>
@@ -6017,9 +6000,13 @@
             </a:r>
           </a:p>
           <a:p>
-            <a:pPr algn="l"/>
-            <a:r>
-              <a:rPr sz="1700">
+            <a:pPr>
+              <a:spcAft>
+                <a:spcPts val="400"/>
+              </a:spcAft>
+            </a:pPr>
+            <a:r>
+              <a:rPr sz="1700" b="0">
                 <a:solidFill>
                   <a:srgbClr val="2B4A7D"/>
                 </a:solidFill>
@@ -6028,51 +6015,81 @@
               <a:t>amount &gt; 2000</a:t>
             </a:r>
           </a:p>
-          <a:p>
-            <a:pPr algn="l"/>
-            <a:r>
-              <a:rPr b="0" sz="2100">
+        </p:txBody>
+      </p:sp>
+      <p:sp>
+        <p:nvSpPr>
+          <p:cNvPr id="5" name="TextBox 4"/>
+          <p:cNvSpPr txBox="1"/>
+          <p:nvPr/>
+        </p:nvSpPr>
+        <p:spPr>
+          <a:xfrm>
+            <a:off x="777240" y="2769870"/>
+            <a:ext cx="10607040" cy="502920"/>
+          </a:xfrm>
+          <a:prstGeom prst="rect">
+            <a:avLst/>
+          </a:prstGeom>
+          <a:noFill/>
+        </p:spPr>
+        <p:txBody>
+          <a:bodyPr wrap="square">
+            <a:spAutoFit/>
+          </a:bodyPr>
+          <a:lstStyle/>
+          <a:p>
+            <a:pPr>
+              <a:spcAft>
+                <a:spcPts val="400"/>
+              </a:spcAft>
+            </a:pPr>
+            <a:r>
+              <a:rPr sz="1700" b="0">
+                <a:solidFill>
+                  <a:srgbClr val="2B4A7D"/>
+                </a:solidFill>
+                <a:latin typeface="Consolas"/>
+              </a:rPr>
+              <a:t>TypeError: '&gt;' not supported between instances of 'str' and 'int'</a:t>
+            </a:r>
+          </a:p>
+        </p:txBody>
+      </p:sp>
+      <p:sp>
+        <p:nvSpPr>
+          <p:cNvPr id="6" name="TextBox 5"/>
+          <p:cNvSpPr txBox="1"/>
+          <p:nvPr/>
+        </p:nvSpPr>
+        <p:spPr>
+          <a:xfrm>
+            <a:off x="777240" y="3409950"/>
+            <a:ext cx="10607040" cy="790575"/>
+          </a:xfrm>
+          <a:prstGeom prst="rect">
+            <a:avLst/>
+          </a:prstGeom>
+          <a:noFill/>
+        </p:spPr>
+        <p:txBody>
+          <a:bodyPr wrap="square">
+            <a:spAutoFit/>
+          </a:bodyPr>
+          <a:lstStyle/>
+          <a:p>
+            <a:pPr>
+              <a:spcAft>
+                <a:spcPts val="1000"/>
+              </a:spcAft>
+            </a:pPr>
+            <a:r>
+              <a:rPr sz="2100" b="0">
                 <a:solidFill>
                   <a:srgbClr val="1C1C1A"/>
                 </a:solidFill>
                 <a:latin typeface="Calibri"/>
               </a:rPr>
-              <a:t> </a:t>
-            </a:r>
-          </a:p>
-          <a:p>
-            <a:pPr algn="l"/>
-            <a:r>
-              <a:rPr sz="1700">
-                <a:solidFill>
-                  <a:srgbClr val="2B4A7D"/>
-                </a:solidFill>
-                <a:latin typeface="Consolas"/>
-              </a:rPr>
-              <a:t>TypeError: '&gt;' not supported between instances of 'str' and 'int'</a:t>
-            </a:r>
-          </a:p>
-          <a:p>
-            <a:pPr algn="l"/>
-            <a:r>
-              <a:rPr b="0" sz="2100">
-                <a:solidFill>
-                  <a:srgbClr val="1C1C1A"/>
-                </a:solidFill>
-                <a:latin typeface="Calibri"/>
-              </a:rPr>
-              <a:t> </a:t>
-            </a:r>
-          </a:p>
-          <a:p>
-            <a:pPr algn="l"/>
-            <a:r>
-              <a:rPr b="0" sz="2100">
-                <a:solidFill>
-                  <a:srgbClr val="1C1C1A"/>
-                </a:solidFill>
-                <a:latin typeface="Calibri"/>
-              </a:rPr>
               <a:t>Python was asked whether a piece of text is greater than a number. It stopped and named both types it was holding.</a:t>
             </a:r>
           </a:p>
@@ -6080,13 +6097,13 @@
       </p:sp>
       <p:sp>
         <p:nvSpPr>
-          <p:cNvPr id="5" name="TextBox 4"/>
-          <p:cNvSpPr txBox="1"/>
-          <p:nvPr/>
-        </p:nvSpPr>
-        <p:spPr>
-          <a:xfrm>
-            <a:off x="777240" y="6263640"/>
+          <p:cNvPr id="7" name="TextBox 6"/>
+          <p:cNvSpPr txBox="1"/>
+          <p:nvPr/>
+        </p:nvSpPr>
+        <p:spPr>
+          <a:xfrm>
+            <a:off x="777240" y="6309360"/>
             <a:ext cx="10607040" cy="365760"/>
           </a:xfrm>
           <a:prstGeom prst="rect">
@@ -6095,13 +6112,13 @@
           <a:noFill/>
         </p:spPr>
         <p:txBody>
-          <a:bodyPr wrap="square">
-            <a:spAutoFit/>
-          </a:bodyPr>
-          <a:lstStyle/>
-          <a:p>
-            <a:r>
-              <a:rPr sz="1000" b="0">
+          <a:bodyPr wrap="none">
+            <a:spAutoFit/>
+          </a:bodyPr>
+          <a:lstStyle/>
+          <a:p>
+            <a:r>
+              <a:rPr sz="1000">
                 <a:solidFill>
                   <a:srgbClr val="5F6360"/>
                 </a:solidFill>
@@ -6217,7 +6234,7 @@
         <p:spPr>
           <a:xfrm>
             <a:off x="777240" y="1965960"/>
-            <a:ext cx="10607040" cy="4206240"/>
+            <a:ext cx="10607040" cy="1162050"/>
           </a:xfrm>
           <a:prstGeom prst="rect">
             <a:avLst/>
@@ -6230,9 +6247,13 @@
           </a:bodyPr>
           <a:lstStyle/>
           <a:p>
-            <a:pPr algn="l"/>
-            <a:r>
-              <a:rPr b="0" sz="2100">
+            <a:pPr>
+              <a:spcAft>
+                <a:spcPts val="1000"/>
+              </a:spcAft>
+            </a:pPr>
+            <a:r>
+              <a:rPr sz="2100" b="0">
                 <a:solidFill>
                   <a:srgbClr val="1C1C1A"/>
                 </a:solidFill>
@@ -6242,26 +6263,18 @@
             </a:r>
           </a:p>
           <a:p>
-            <a:pPr algn="l"/>
-            <a:r>
-              <a:rPr b="0" sz="2100">
+            <a:pPr>
+              <a:spcAft>
+                <a:spcPts val="1000"/>
+              </a:spcAft>
+            </a:pPr>
+            <a:r>
+              <a:rPr sz="2100" b="0">
                 <a:solidFill>
                   <a:srgbClr val="1C1C1A"/>
                 </a:solidFill>
                 <a:latin typeface="Calibri"/>
               </a:rPr>
-              <a:t> </a:t>
-            </a:r>
-          </a:p>
-          <a:p>
-            <a:pPr algn="l"/>
-            <a:r>
-              <a:rPr b="0" sz="2100">
-                <a:solidFill>
-                  <a:srgbClr val="1C1C1A"/>
-                </a:solidFill>
-                <a:latin typeface="Calibri"/>
-              </a:rPr>
               <a:t>Today's type discipline is the small version of that lesson.</a:t>
             </a:r>
           </a:p>
@@ -6275,7 +6288,7 @@
         </p:nvSpPr>
         <p:spPr>
           <a:xfrm>
-            <a:off x="777240" y="6263640"/>
+            <a:off x="777240" y="6309360"/>
             <a:ext cx="10607040" cy="365760"/>
           </a:xfrm>
           <a:prstGeom prst="rect">
@@ -6284,13 +6297,13 @@
           <a:noFill/>
         </p:spPr>
         <p:txBody>
-          <a:bodyPr wrap="square">
-            <a:spAutoFit/>
-          </a:bodyPr>
-          <a:lstStyle/>
-          <a:p>
-            <a:r>
-              <a:rPr sz="1000" b="0">
+          <a:bodyPr wrap="none">
+            <a:spAutoFit/>
+          </a:bodyPr>
+          <a:lstStyle/>
+          <a:p>
+            <a:r>
+              <a:rPr sz="1000">
                 <a:solidFill>
                   <a:srgbClr val="5F6360"/>
                 </a:solidFill>
@@ -6406,7 +6419,7 @@
         <p:spPr>
           <a:xfrm>
             <a:off x="777240" y="1965960"/>
-            <a:ext cx="10607040" cy="4206240"/>
+            <a:ext cx="10607040" cy="1781175"/>
           </a:xfrm>
           <a:prstGeom prst="rect">
             <a:avLst/>
@@ -6419,9 +6432,13 @@
           </a:bodyPr>
           <a:lstStyle/>
           <a:p>
-            <a:pPr algn="l"/>
-            <a:r>
-              <a:rPr b="0" sz="2100">
+            <a:pPr>
+              <a:spcAft>
+                <a:spcPts val="1000"/>
+              </a:spcAft>
+            </a:pPr>
+            <a:r>
+              <a:rPr sz="2100" b="0">
                 <a:solidFill>
                   <a:srgbClr val="1C1C1A"/>
                 </a:solidFill>
@@ -6431,50 +6448,34 @@
             </a:r>
           </a:p>
           <a:p>
-            <a:pPr algn="l"/>
-            <a:r>
-              <a:rPr b="0" sz="2100">
+            <a:pPr>
+              <a:spcAft>
+                <a:spcPts val="1000"/>
+              </a:spcAft>
+            </a:pPr>
+            <a:r>
+              <a:rPr sz="2100" b="0">
                 <a:solidFill>
                   <a:srgbClr val="1C1C1A"/>
                 </a:solidFill>
                 <a:latin typeface="Calibri"/>
               </a:rPr>
-              <a:t> </a:t>
-            </a:r>
-          </a:p>
-          <a:p>
-            <a:pPr algn="l"/>
-            <a:r>
-              <a:rPr b="0" sz="2100">
+              <a:t>Python refuses the comparison and tells you which two types it was holding. You lose ten seconds and you keep the truth.</a:t>
+            </a:r>
+          </a:p>
+          <a:p>
+            <a:pPr>
+              <a:spcAft>
+                <a:spcPts val="1000"/>
+              </a:spcAft>
+            </a:pPr>
+            <a:r>
+              <a:rPr sz="2100" b="0">
                 <a:solidFill>
                   <a:srgbClr val="1C1C1A"/>
                 </a:solidFill>
                 <a:latin typeface="Calibri"/>
               </a:rPr>
-              <a:t>Python refuses the comparison and tells you which two types it was holding. You lose ten seconds and you keep the truth.</a:t>
-            </a:r>
-          </a:p>
-          <a:p>
-            <a:pPr algn="l"/>
-            <a:r>
-              <a:rPr b="0" sz="2100">
-                <a:solidFill>
-                  <a:srgbClr val="1C1C1A"/>
-                </a:solidFill>
-                <a:latin typeface="Calibri"/>
-              </a:rPr>
-              <a:t> </a:t>
-            </a:r>
-          </a:p>
-          <a:p>
-            <a:pPr algn="l"/>
-            <a:r>
-              <a:rPr b="0" sz="2100">
-                <a:solidFill>
-                  <a:srgbClr val="1C1C1A"/>
-                </a:solidFill>
-                <a:latin typeface="Calibri"/>
-              </a:rPr>
               <a:t>That is your answer when someone asks why the error was the good outcome.</a:t>
             </a:r>
           </a:p>
@@ -6488,7 +6489,7 @@
         </p:nvSpPr>
         <p:spPr>
           <a:xfrm>
-            <a:off x="777240" y="6263640"/>
+            <a:off x="777240" y="6309360"/>
             <a:ext cx="10607040" cy="365760"/>
           </a:xfrm>
           <a:prstGeom prst="rect">
@@ -6497,13 +6498,13 @@
           <a:noFill/>
         </p:spPr>
         <p:txBody>
-          <a:bodyPr wrap="square">
-            <a:spAutoFit/>
-          </a:bodyPr>
-          <a:lstStyle/>
-          <a:p>
-            <a:r>
-              <a:rPr sz="1000" b="0">
+          <a:bodyPr wrap="none">
+            <a:spAutoFit/>
+          </a:bodyPr>
+          <a:lstStyle/>
+          <a:p>
+            <a:r>
+              <a:rPr sz="1000">
                 <a:solidFill>
                   <a:srgbClr val="5F6360"/>
                 </a:solidFill>
@@ -6619,7 +6620,7 @@
         <p:spPr>
           <a:xfrm>
             <a:off x="777240" y="1965960"/>
-            <a:ext cx="10607040" cy="4206240"/>
+            <a:ext cx="10607040" cy="1162050"/>
           </a:xfrm>
           <a:prstGeom prst="rect">
             <a:avLst/>
@@ -6632,9 +6633,13 @@
           </a:bodyPr>
           <a:lstStyle/>
           <a:p>
-            <a:pPr algn="l"/>
-            <a:r>
-              <a:rPr sz="1700">
+            <a:pPr>
+              <a:spcAft>
+                <a:spcPts val="400"/>
+              </a:spcAft>
+            </a:pPr>
+            <a:r>
+              <a:rPr sz="1700" b="0">
                 <a:solidFill>
                   <a:srgbClr val="2B4A7D"/>
                 </a:solidFill>
@@ -6644,9 +6649,13 @@
             </a:r>
           </a:p>
           <a:p>
-            <a:pPr algn="l"/>
-            <a:r>
-              <a:rPr sz="1700">
+            <a:pPr>
+              <a:spcAft>
+                <a:spcPts val="400"/>
+              </a:spcAft>
+            </a:pPr>
+            <a:r>
+              <a:rPr sz="1700" b="0">
                 <a:solidFill>
                   <a:srgbClr val="2B4A7D"/>
                 </a:solidFill>
@@ -6656,9 +6665,13 @@
             </a:r>
           </a:p>
           <a:p>
-            <a:pPr algn="l"/>
-            <a:r>
-              <a:rPr sz="1700">
+            <a:pPr>
+              <a:spcAft>
+                <a:spcPts val="400"/>
+              </a:spcAft>
+            </a:pPr>
+            <a:r>
+              <a:rPr sz="1700" b="0">
                 <a:solidFill>
                   <a:srgbClr val="2B4A7D"/>
                 </a:solidFill>
@@ -6668,9 +6681,13 @@
             </a:r>
           </a:p>
           <a:p>
-            <a:pPr algn="l"/>
-            <a:r>
-              <a:rPr sz="1700">
+            <a:pPr>
+              <a:spcAft>
+                <a:spcPts val="400"/>
+              </a:spcAft>
+            </a:pPr>
+            <a:r>
+              <a:rPr sz="1700" b="0">
                 <a:solidFill>
                   <a:srgbClr val="2B4A7D"/>
                 </a:solidFill>
@@ -6679,95 +6696,56 @@
               <a:t>"delivered" != "returned"     True</a:t>
             </a:r>
           </a:p>
-          <a:p>
-            <a:pPr algn="l"/>
-            <a:r>
-              <a:rPr b="0" sz="2100">
+        </p:txBody>
+      </p:sp>
+      <p:sp>
+        <p:nvSpPr>
+          <p:cNvPr id="5" name="TextBox 4"/>
+          <p:cNvSpPr txBox="1"/>
+          <p:nvPr/>
+        </p:nvSpPr>
+        <p:spPr>
+          <a:xfrm>
+            <a:off x="777240" y="3265169"/>
+            <a:ext cx="10607040" cy="542925"/>
+          </a:xfrm>
+          <a:prstGeom prst="rect">
+            <a:avLst/>
+          </a:prstGeom>
+          <a:noFill/>
+        </p:spPr>
+        <p:txBody>
+          <a:bodyPr wrap="square">
+            <a:spAutoFit/>
+          </a:bodyPr>
+          <a:lstStyle/>
+          <a:p>
+            <a:pPr>
+              <a:spcAft>
+                <a:spcPts val="1000"/>
+              </a:spcAft>
+            </a:pPr>
+            <a:r>
+              <a:rPr sz="2100" b="0">
                 <a:solidFill>
                   <a:srgbClr val="1C1C1A"/>
                 </a:solidFill>
                 <a:latin typeface="Calibri"/>
               </a:rPr>
-              <a:t> </a:t>
-            </a:r>
-          </a:p>
-          <a:p>
-            <a:pPr algn="l"/>
-            <a:r>
-              <a:rPr b="0" sz="2100">
-                <a:solidFill>
-                  <a:srgbClr val="1C1C1A"/>
-                </a:solidFill>
-                <a:latin typeface="Calibri"/>
-              </a:rPr>
-              <a:t>Each of these hands back a </a:t>
-            </a:r>
-            <a:r>
-              <a:rPr b="0" sz="1800">
-                <a:solidFill>
-                  <a:srgbClr val="2B4A7D"/>
-                </a:solidFill>
-                <a:latin typeface="Consolas"/>
-              </a:rPr>
-              <a:t>bool</a:t>
-            </a:r>
-            <a:r>
-              <a:rPr b="0" sz="2100">
-                <a:solidFill>
-                  <a:srgbClr val="1C1C1A"/>
-                </a:solidFill>
-                <a:latin typeface="Calibri"/>
-              </a:rPr>
-              <a:t>, and the </a:t>
-            </a:r>
-            <a:r>
-              <a:rPr b="0" sz="1800">
-                <a:solidFill>
-                  <a:srgbClr val="2B4A7D"/>
-                </a:solidFill>
-                <a:latin typeface="Consolas"/>
-              </a:rPr>
-              <a:t>if</a:t>
-            </a:r>
-            <a:r>
-              <a:rPr b="0" sz="2100">
-                <a:solidFill>
-                  <a:srgbClr val="1C1C1A"/>
-                </a:solidFill>
-                <a:latin typeface="Calibri"/>
-              </a:rPr>
-              <a:t> statement reads that </a:t>
-            </a:r>
-            <a:r>
-              <a:rPr b="0" sz="1800">
-                <a:solidFill>
-                  <a:srgbClr val="2B4A7D"/>
-                </a:solidFill>
-                <a:latin typeface="Consolas"/>
-              </a:rPr>
-              <a:t>bool</a:t>
-            </a:r>
-            <a:r>
-              <a:rPr b="0" sz="2100">
-                <a:solidFill>
-                  <a:srgbClr val="1C1C1A"/>
-                </a:solidFill>
-                <a:latin typeface="Calibri"/>
-              </a:rPr>
-              <a:t> and nothing else.</a:t>
-            </a:r>
-          </a:p>
-        </p:txBody>
-      </p:sp>
-      <p:sp>
-        <p:nvSpPr>
-          <p:cNvPr id="5" name="TextBox 4"/>
-          <p:cNvSpPr txBox="1"/>
-          <p:nvPr/>
-        </p:nvSpPr>
-        <p:spPr>
-          <a:xfrm>
-            <a:off x="777240" y="6263640"/>
+              <a:t>Each of these hands back a bool, and the if statement reads that bool and nothing else.</a:t>
+            </a:r>
+          </a:p>
+        </p:txBody>
+      </p:sp>
+      <p:sp>
+        <p:nvSpPr>
+          <p:cNvPr id="6" name="TextBox 5"/>
+          <p:cNvSpPr txBox="1"/>
+          <p:nvPr/>
+        </p:nvSpPr>
+        <p:spPr>
+          <a:xfrm>
+            <a:off x="777240" y="6309360"/>
             <a:ext cx="10607040" cy="365760"/>
           </a:xfrm>
           <a:prstGeom prst="rect">
@@ -6776,13 +6754,13 @@
           <a:noFill/>
         </p:spPr>
         <p:txBody>
-          <a:bodyPr wrap="square">
-            <a:spAutoFit/>
-          </a:bodyPr>
-          <a:lstStyle/>
-          <a:p>
-            <a:r>
-              <a:rPr sz="1000" b="0">
+          <a:bodyPr wrap="none">
+            <a:spAutoFit/>
+          </a:bodyPr>
+          <a:lstStyle/>
+          <a:p>
+            <a:r>
+              <a:rPr sz="1000">
                 <a:solidFill>
                   <a:srgbClr val="5F6360"/>
                 </a:solidFill>
@@ -6898,7 +6876,7 @@
         <p:spPr>
           <a:xfrm>
             <a:off x="777240" y="1965960"/>
-            <a:ext cx="10607040" cy="4206240"/>
+            <a:ext cx="10607040" cy="1905000"/>
           </a:xfrm>
           <a:prstGeom prst="rect">
             <a:avLst/>
@@ -6911,9 +6889,13 @@
           </a:bodyPr>
           <a:lstStyle/>
           <a:p>
-            <a:pPr algn="l"/>
-            <a:r>
-              <a:rPr sz="1700">
+            <a:pPr>
+              <a:spcAft>
+                <a:spcPts val="400"/>
+              </a:spcAft>
+            </a:pPr>
+            <a:r>
+              <a:rPr sz="1700" b="0">
                 <a:solidFill>
                   <a:srgbClr val="2B4A7D"/>
                 </a:solidFill>
@@ -6923,9 +6905,13 @@
             </a:r>
           </a:p>
           <a:p>
-            <a:pPr algn="l"/>
-            <a:r>
-              <a:rPr sz="1700">
+            <a:pPr>
+              <a:spcAft>
+                <a:spcPts val="400"/>
+              </a:spcAft>
+            </a:pPr>
+            <a:r>
+              <a:rPr sz="1700" b="0">
                 <a:solidFill>
                   <a:srgbClr val="2B4A7D"/>
                 </a:solidFill>
@@ -6935,9 +6921,13 @@
             </a:r>
           </a:p>
           <a:p>
-            <a:pPr algn="l"/>
-            <a:r>
-              <a:rPr sz="1700">
+            <a:pPr>
+              <a:spcAft>
+                <a:spcPts val="400"/>
+              </a:spcAft>
+            </a:pPr>
+            <a:r>
+              <a:rPr sz="1700" b="0">
                 <a:solidFill>
                   <a:srgbClr val="2B4A7D"/>
                 </a:solidFill>
@@ -6947,9 +6937,13 @@
             </a:r>
           </a:p>
           <a:p>
-            <a:pPr algn="l"/>
-            <a:r>
-              <a:rPr sz="1700">
+            <a:pPr>
+              <a:spcAft>
+                <a:spcPts val="400"/>
+              </a:spcAft>
+            </a:pPr>
+            <a:r>
+              <a:rPr sz="1700" b="0">
                 <a:solidFill>
                   <a:srgbClr val="2B4A7D"/>
                 </a:solidFill>
@@ -6959,9 +6953,13 @@
             </a:r>
           </a:p>
           <a:p>
-            <a:pPr algn="l"/>
-            <a:r>
-              <a:rPr sz="1700">
+            <a:pPr>
+              <a:spcAft>
+                <a:spcPts val="400"/>
+              </a:spcAft>
+            </a:pPr>
+            <a:r>
+              <a:rPr sz="1700" b="0">
                 <a:solidFill>
                   <a:srgbClr val="2B4A7D"/>
                 </a:solidFill>
@@ -6971,9 +6969,13 @@
             </a:r>
           </a:p>
           <a:p>
-            <a:pPr algn="l"/>
-            <a:r>
-              <a:rPr sz="1700">
+            <a:pPr>
+              <a:spcAft>
+                <a:spcPts val="400"/>
+              </a:spcAft>
+            </a:pPr>
+            <a:r>
+              <a:rPr sz="1700" b="0">
                 <a:solidFill>
                   <a:srgbClr val="2B4A7D"/>
                 </a:solidFill>
@@ -6983,9 +6985,13 @@
             </a:r>
           </a:p>
           <a:p>
-            <a:pPr algn="l"/>
-            <a:r>
-              <a:rPr sz="1700">
+            <a:pPr>
+              <a:spcAft>
+                <a:spcPts val="400"/>
+              </a:spcAft>
+            </a:pPr>
+            <a:r>
+              <a:rPr sz="1700" b="0">
                 <a:solidFill>
                   <a:srgbClr val="2B4A7D"/>
                 </a:solidFill>
@@ -6994,77 +7000,56 @@
               <a:t>    band = "small"</a:t>
             </a:r>
           </a:p>
-          <a:p>
-            <a:pPr algn="l"/>
-            <a:r>
-              <a:rPr b="0" sz="2100">
+        </p:txBody>
+      </p:sp>
+      <p:sp>
+        <p:nvSpPr>
+          <p:cNvPr id="5" name="TextBox 4"/>
+          <p:cNvSpPr txBox="1"/>
+          <p:nvPr/>
+        </p:nvSpPr>
+        <p:spPr>
+          <a:xfrm>
+            <a:off x="777240" y="4008119"/>
+            <a:ext cx="10607040" cy="790575"/>
+          </a:xfrm>
+          <a:prstGeom prst="rect">
+            <a:avLst/>
+          </a:prstGeom>
+          <a:noFill/>
+        </p:spPr>
+        <p:txBody>
+          <a:bodyPr wrap="square">
+            <a:spAutoFit/>
+          </a:bodyPr>
+          <a:lstStyle/>
+          <a:p>
+            <a:pPr>
+              <a:spcAft>
+                <a:spcPts val="1000"/>
+              </a:spcAft>
+            </a:pPr>
+            <a:r>
+              <a:rPr sz="2100" b="0">
                 <a:solidFill>
                   <a:srgbClr val="1C1C1A"/>
                 </a:solidFill>
                 <a:latin typeface="Calibri"/>
               </a:rPr>
-              <a:t> </a:t>
-            </a:r>
-          </a:p>
-          <a:p>
-            <a:pPr algn="l"/>
-            <a:r>
-              <a:rPr b="0" sz="2100">
-                <a:solidFill>
-                  <a:srgbClr val="1C1C1A"/>
-                </a:solidFill>
-                <a:latin typeface="Calibri"/>
-              </a:rPr>
-              <a:t>Python tries the conditions from the top and stops at the first one that is </a:t>
-            </a:r>
-            <a:r>
-              <a:rPr b="0" sz="1800">
-                <a:solidFill>
-                  <a:srgbClr val="2B4A7D"/>
-                </a:solidFill>
-                <a:latin typeface="Consolas"/>
-              </a:rPr>
-              <a:t>True</a:t>
-            </a:r>
-            <a:r>
-              <a:rPr b="0" sz="2100">
-                <a:solidFill>
-                  <a:srgbClr val="1C1C1A"/>
-                </a:solidFill>
-                <a:latin typeface="Calibri"/>
-              </a:rPr>
-              <a:t>, so </a:t>
-            </a:r>
-            <a:r>
-              <a:rPr b="0" sz="1800">
-                <a:solidFill>
-                  <a:srgbClr val="2B4A7D"/>
-                </a:solidFill>
-                <a:latin typeface="Consolas"/>
-              </a:rPr>
-              <a:t>band</a:t>
-            </a:r>
-            <a:r>
-              <a:rPr b="0" sz="2100">
-                <a:solidFill>
-                  <a:srgbClr val="1C1C1A"/>
-                </a:solidFill>
-                <a:latin typeface="Calibri"/>
-              </a:rPr>
-              <a:t> holds "small" here.</a:t>
-            </a:r>
-          </a:p>
-        </p:txBody>
-      </p:sp>
-      <p:sp>
-        <p:nvSpPr>
-          <p:cNvPr id="5" name="TextBox 4"/>
-          <p:cNvSpPr txBox="1"/>
-          <p:nvPr/>
-        </p:nvSpPr>
-        <p:spPr>
-          <a:xfrm>
-            <a:off x="777240" y="6263640"/>
+              <a:t>Python tries the conditions from the top and stops at the first one that is True, so band holds "small" here.</a:t>
+            </a:r>
+          </a:p>
+        </p:txBody>
+      </p:sp>
+      <p:sp>
+        <p:nvSpPr>
+          <p:cNvPr id="6" name="TextBox 5"/>
+          <p:cNvSpPr txBox="1"/>
+          <p:nvPr/>
+        </p:nvSpPr>
+        <p:spPr>
+          <a:xfrm>
+            <a:off x="777240" y="6309360"/>
             <a:ext cx="10607040" cy="365760"/>
           </a:xfrm>
           <a:prstGeom prst="rect">
@@ -7073,13 +7058,13 @@
           <a:noFill/>
         </p:spPr>
         <p:txBody>
-          <a:bodyPr wrap="square">
-            <a:spAutoFit/>
-          </a:bodyPr>
-          <a:lstStyle/>
-          <a:p>
-            <a:r>
-              <a:rPr sz="1000" b="0">
+          <a:bodyPr wrap="none">
+            <a:spAutoFit/>
+          </a:bodyPr>
+          <a:lstStyle/>
+          <a:p>
+            <a:r>
+              <a:rPr sz="1000">
                 <a:solidFill>
                   <a:srgbClr val="5F6360"/>
                 </a:solidFill>
@@ -7195,7 +7180,7 @@
         <p:spPr>
           <a:xfrm>
             <a:off x="777240" y="1965960"/>
-            <a:ext cx="10607040" cy="4206240"/>
+            <a:ext cx="10607040" cy="542925"/>
           </a:xfrm>
           <a:prstGeom prst="rect">
             <a:avLst/>
@@ -7208,92 +7193,112 @@
           </a:bodyPr>
           <a:lstStyle/>
           <a:p>
-            <a:pPr algn="l"/>
-            <a:r>
-              <a:rPr b="0" sz="2100">
+            <a:pPr>
+              <a:spcAft>
+                <a:spcPts val="1000"/>
+              </a:spcAft>
+            </a:pPr>
+            <a:r>
+              <a:rPr sz="2100" b="0">
                 <a:solidFill>
                   <a:srgbClr val="1C1C1A"/>
                 </a:solidFill>
                 <a:latin typeface="Calibri"/>
               </a:rPr>
-              <a:t>A dataset is a stack of cards, and the loop deals you one card at a time and calls it </a:t>
-            </a:r>
-            <a:r>
-              <a:rPr b="0" sz="1800">
+              <a:t>A dataset is a stack of cards, and the loop deals you one card at a time and calls it r.</a:t>
+            </a:r>
+          </a:p>
+        </p:txBody>
+      </p:sp>
+      <p:sp>
+        <p:nvSpPr>
+          <p:cNvPr id="5" name="TextBox 4"/>
+          <p:cNvSpPr txBox="1"/>
+          <p:nvPr/>
+        </p:nvSpPr>
+        <p:spPr>
+          <a:xfrm>
+            <a:off x="777240" y="2646045"/>
+            <a:ext cx="10607040" cy="666750"/>
+          </a:xfrm>
+          <a:prstGeom prst="rect">
+            <a:avLst/>
+          </a:prstGeom>
+          <a:noFill/>
+        </p:spPr>
+        <p:txBody>
+          <a:bodyPr wrap="square">
+            <a:spAutoFit/>
+          </a:bodyPr>
+          <a:lstStyle/>
+          <a:p>
+            <a:pPr>
+              <a:spcAft>
+                <a:spcPts val="400"/>
+              </a:spcAft>
+            </a:pPr>
+            <a:r>
+              <a:rPr sz="1700" b="0">
                 <a:solidFill>
                   <a:srgbClr val="2B4A7D"/>
                 </a:solidFill>
                 <a:latin typeface="Consolas"/>
               </a:rPr>
-              <a:t>r</a:t>
-            </a:r>
-            <a:r>
-              <a:rPr b="0" sz="2100">
+              <a:t>for r in records:</a:t>
+            </a:r>
+          </a:p>
+          <a:p>
+            <a:pPr>
+              <a:spcAft>
+                <a:spcPts val="400"/>
+              </a:spcAft>
+            </a:pPr>
+            <a:r>
+              <a:rPr sz="1700" b="0">
+                <a:solidFill>
+                  <a:srgbClr val="2B4A7D"/>
+                </a:solidFill>
+                <a:latin typeface="Consolas"/>
+              </a:rPr>
+              <a:t>    print(r["order_id"])</a:t>
+            </a:r>
+          </a:p>
+        </p:txBody>
+      </p:sp>
+      <p:sp>
+        <p:nvSpPr>
+          <p:cNvPr id="6" name="TextBox 5"/>
+          <p:cNvSpPr txBox="1"/>
+          <p:nvPr/>
+        </p:nvSpPr>
+        <p:spPr>
+          <a:xfrm>
+            <a:off x="777240" y="3449954"/>
+            <a:ext cx="10607040" cy="790575"/>
+          </a:xfrm>
+          <a:prstGeom prst="rect">
+            <a:avLst/>
+          </a:prstGeom>
+          <a:noFill/>
+        </p:spPr>
+        <p:txBody>
+          <a:bodyPr wrap="square">
+            <a:spAutoFit/>
+          </a:bodyPr>
+          <a:lstStyle/>
+          <a:p>
+            <a:pPr>
+              <a:spcAft>
+                <a:spcPts val="1000"/>
+              </a:spcAft>
+            </a:pPr>
+            <a:r>
+              <a:rPr sz="2100" b="0">
                 <a:solidFill>
                   <a:srgbClr val="1C1C1A"/>
                 </a:solidFill>
                 <a:latin typeface="Calibri"/>
               </a:rPr>
-              <a:t>.</a:t>
-            </a:r>
-          </a:p>
-          <a:p>
-            <a:pPr algn="l"/>
-            <a:r>
-              <a:rPr b="0" sz="2100">
-                <a:solidFill>
-                  <a:srgbClr val="1C1C1A"/>
-                </a:solidFill>
-                <a:latin typeface="Calibri"/>
-              </a:rPr>
-              <a:t> </a:t>
-            </a:r>
-          </a:p>
-          <a:p>
-            <a:pPr algn="l"/>
-            <a:r>
-              <a:rPr sz="1700">
-                <a:solidFill>
-                  <a:srgbClr val="2B4A7D"/>
-                </a:solidFill>
-                <a:latin typeface="Consolas"/>
-              </a:rPr>
-              <a:t>for r in records:</a:t>
-            </a:r>
-          </a:p>
-          <a:p>
-            <a:pPr algn="l"/>
-            <a:r>
-              <a:rPr sz="1700">
-                <a:solidFill>
-                  <a:srgbClr val="2B4A7D"/>
-                </a:solidFill>
-                <a:latin typeface="Consolas"/>
-              </a:rPr>
-              <a:t>    print(r["order_id"])</a:t>
-            </a:r>
-          </a:p>
-          <a:p>
-            <a:pPr algn="l"/>
-            <a:r>
-              <a:rPr b="0" sz="2100">
-                <a:solidFill>
-                  <a:srgbClr val="1C1C1A"/>
-                </a:solidFill>
-                <a:latin typeface="Calibri"/>
-              </a:rPr>
-              <a:t> </a:t>
-            </a:r>
-          </a:p>
-          <a:p>
-            <a:pPr algn="l"/>
-            <a:r>
-              <a:rPr b="0" sz="2100">
-                <a:solidFill>
-                  <a:srgbClr val="1C1C1A"/>
-                </a:solidFill>
-                <a:latin typeface="Calibri"/>
-              </a:rPr>
               <a:t>Thirty records means thirty turns through the indented lines. The way a field is fetched by its name gets its proper treatment in half two.</a:t>
             </a:r>
           </a:p>
@@ -7301,13 +7306,13 @@
       </p:sp>
       <p:sp>
         <p:nvSpPr>
-          <p:cNvPr id="5" name="TextBox 4"/>
-          <p:cNvSpPr txBox="1"/>
-          <p:nvPr/>
-        </p:nvSpPr>
-        <p:spPr>
-          <a:xfrm>
-            <a:off x="777240" y="6263640"/>
+          <p:cNvPr id="7" name="TextBox 6"/>
+          <p:cNvSpPr txBox="1"/>
+          <p:nvPr/>
+        </p:nvSpPr>
+        <p:spPr>
+          <a:xfrm>
+            <a:off x="777240" y="6309360"/>
             <a:ext cx="10607040" cy="365760"/>
           </a:xfrm>
           <a:prstGeom prst="rect">
@@ -7316,13 +7321,13 @@
           <a:noFill/>
         </p:spPr>
         <p:txBody>
-          <a:bodyPr wrap="square">
-            <a:spAutoFit/>
-          </a:bodyPr>
-          <a:lstStyle/>
-          <a:p>
-            <a:r>
-              <a:rPr sz="1000" b="0">
+          <a:bodyPr wrap="none">
+            <a:spAutoFit/>
+          </a:bodyPr>
+          <a:lstStyle/>
+          <a:p>
+            <a:r>
+              <a:rPr sz="1000">
                 <a:solidFill>
                   <a:srgbClr val="5F6360"/>
                 </a:solidFill>
@@ -7438,7 +7443,7 @@
         <p:spPr>
           <a:xfrm>
             <a:off x="777240" y="1965960"/>
-            <a:ext cx="10607040" cy="4206240"/>
+            <a:ext cx="10607040" cy="1657350"/>
           </a:xfrm>
           <a:prstGeom prst="rect">
             <a:avLst/>
@@ -7451,9 +7456,13 @@
           </a:bodyPr>
           <a:lstStyle/>
           <a:p>
-            <a:pPr algn="l"/>
-            <a:r>
-              <a:rPr sz="1700">
+            <a:pPr>
+              <a:spcAft>
+                <a:spcPts val="400"/>
+              </a:spcAft>
+            </a:pPr>
+            <a:r>
+              <a:rPr sz="1700" b="0">
                 <a:solidFill>
                   <a:srgbClr val="2B4A7D"/>
                 </a:solidFill>
@@ -7463,9 +7472,13 @@
             </a:r>
           </a:p>
           <a:p>
-            <a:pPr algn="l"/>
-            <a:r>
-              <a:rPr sz="1700">
+            <a:pPr>
+              <a:spcAft>
+                <a:spcPts val="400"/>
+              </a:spcAft>
+            </a:pPr>
+            <a:r>
+              <a:rPr sz="1700" b="0">
                 <a:solidFill>
                   <a:srgbClr val="2B4A7D"/>
                 </a:solidFill>
@@ -7475,9 +7488,13 @@
             </a:r>
           </a:p>
           <a:p>
-            <a:pPr algn="l"/>
-            <a:r>
-              <a:rPr sz="1700">
+            <a:pPr>
+              <a:spcAft>
+                <a:spcPts val="400"/>
+              </a:spcAft>
+            </a:pPr>
+            <a:r>
+              <a:rPr sz="1700" b="0">
                 <a:solidFill>
                   <a:srgbClr val="2B4A7D"/>
                 </a:solidFill>
@@ -7487,9 +7504,13 @@
             </a:r>
           </a:p>
           <a:p>
-            <a:pPr algn="l"/>
-            <a:r>
-              <a:rPr sz="1700">
+            <a:pPr>
+              <a:spcAft>
+                <a:spcPts val="400"/>
+              </a:spcAft>
+            </a:pPr>
+            <a:r>
+              <a:rPr sz="1700" b="0">
                 <a:solidFill>
                   <a:srgbClr val="2B4A7D"/>
                 </a:solidFill>
@@ -7499,74 +7520,103 @@
             </a:r>
           </a:p>
           <a:p>
-            <a:pPr algn="l"/>
-            <a:r>
-              <a:rPr sz="1700">
+            <a:pPr>
+              <a:spcAft>
+                <a:spcPts val="400"/>
+              </a:spcAft>
+            </a:pPr>
+          </a:p>
+          <a:p>
+            <a:pPr>
+              <a:spcAft>
+                <a:spcPts val="400"/>
+              </a:spcAft>
+            </a:pPr>
+            <a:r>
+              <a:rPr sz="1700" b="0">
                 <a:solidFill>
                   <a:srgbClr val="2B4A7D"/>
                 </a:solidFill>
                 <a:latin typeface="Consolas"/>
               </a:rPr>
-              <a:t> </a:t>
-            </a:r>
-          </a:p>
-          <a:p>
-            <a:pPr algn="l"/>
-            <a:r>
-              <a:rPr sz="1700">
+              <a:t>print(count)</a:t>
+            </a:r>
+          </a:p>
+        </p:txBody>
+      </p:sp>
+      <p:sp>
+        <p:nvSpPr>
+          <p:cNvPr id="5" name="TextBox 4"/>
+          <p:cNvSpPr txBox="1"/>
+          <p:nvPr/>
+        </p:nvSpPr>
+        <p:spPr>
+          <a:xfrm>
+            <a:off x="777240" y="3760470"/>
+            <a:ext cx="10607040" cy="502920"/>
+          </a:xfrm>
+          <a:prstGeom prst="rect">
+            <a:avLst/>
+          </a:prstGeom>
+          <a:noFill/>
+        </p:spPr>
+        <p:txBody>
+          <a:bodyPr wrap="square">
+            <a:spAutoFit/>
+          </a:bodyPr>
+          <a:lstStyle/>
+          <a:p>
+            <a:pPr>
+              <a:spcAft>
+                <a:spcPts val="400"/>
+              </a:spcAft>
+            </a:pPr>
+            <a:r>
+              <a:rPr sz="1700" b="0">
                 <a:solidFill>
                   <a:srgbClr val="2B4A7D"/>
                 </a:solidFill>
                 <a:latin typeface="Consolas"/>
               </a:rPr>
-              <a:t>print(count)</a:t>
-            </a:r>
-          </a:p>
-          <a:p>
-            <a:pPr algn="l"/>
-            <a:r>
-              <a:rPr b="0" sz="2100">
+              <a:t>13</a:t>
+            </a:r>
+          </a:p>
+        </p:txBody>
+      </p:sp>
+      <p:sp>
+        <p:nvSpPr>
+          <p:cNvPr id="6" name="TextBox 5"/>
+          <p:cNvSpPr txBox="1"/>
+          <p:nvPr/>
+        </p:nvSpPr>
+        <p:spPr>
+          <a:xfrm>
+            <a:off x="777240" y="4400550"/>
+            <a:ext cx="10607040" cy="790575"/>
+          </a:xfrm>
+          <a:prstGeom prst="rect">
+            <a:avLst/>
+          </a:prstGeom>
+          <a:noFill/>
+        </p:spPr>
+        <p:txBody>
+          <a:bodyPr wrap="square">
+            <a:spAutoFit/>
+          </a:bodyPr>
+          <a:lstStyle/>
+          <a:p>
+            <a:pPr>
+              <a:spcAft>
+                <a:spcPts val="1000"/>
+              </a:spcAft>
+            </a:pPr>
+            <a:r>
+              <a:rPr sz="2100" b="0">
                 <a:solidFill>
                   <a:srgbClr val="1C1C1A"/>
                 </a:solidFill>
                 <a:latin typeface="Calibri"/>
               </a:rPr>
-              <a:t> </a:t>
-            </a:r>
-          </a:p>
-          <a:p>
-            <a:pPr algn="l"/>
-            <a:r>
-              <a:rPr sz="1700">
-                <a:solidFill>
-                  <a:srgbClr val="2B4A7D"/>
-                </a:solidFill>
-                <a:latin typeface="Consolas"/>
-              </a:rPr>
-              <a:t>13</a:t>
-            </a:r>
-          </a:p>
-          <a:p>
-            <a:pPr algn="l"/>
-            <a:r>
-              <a:rPr b="0" sz="2100">
-                <a:solidFill>
-                  <a:srgbClr val="1C1C1A"/>
-                </a:solidFill>
-                <a:latin typeface="Calibri"/>
-              </a:rPr>
-              <a:t> </a:t>
-            </a:r>
-          </a:p>
-          <a:p>
-            <a:pPr algn="l"/>
-            <a:r>
-              <a:rPr b="0" sz="2100">
-                <a:solidFill>
-                  <a:srgbClr val="1C1C1A"/>
-                </a:solidFill>
-                <a:latin typeface="Calibri"/>
-              </a:rPr>
               <a:t>The counter is set to zero once, above the loop, and each card that passes the condition adds one to it.</a:t>
             </a:r>
           </a:p>
@@ -7574,13 +7624,13 @@
       </p:sp>
       <p:sp>
         <p:nvSpPr>
-          <p:cNvPr id="5" name="TextBox 4"/>
-          <p:cNvSpPr txBox="1"/>
-          <p:nvPr/>
-        </p:nvSpPr>
-        <p:spPr>
-          <a:xfrm>
-            <a:off x="777240" y="6263640"/>
+          <p:cNvPr id="7" name="TextBox 6"/>
+          <p:cNvSpPr txBox="1"/>
+          <p:nvPr/>
+        </p:nvSpPr>
+        <p:spPr>
+          <a:xfrm>
+            <a:off x="777240" y="6309360"/>
             <a:ext cx="10607040" cy="365760"/>
           </a:xfrm>
           <a:prstGeom prst="rect">
@@ -7589,13 +7639,13 @@
           <a:noFill/>
         </p:spPr>
         <p:txBody>
-          <a:bodyPr wrap="square">
-            <a:spAutoFit/>
-          </a:bodyPr>
-          <a:lstStyle/>
-          <a:p>
-            <a:r>
-              <a:rPr sz="1000" b="0">
+          <a:bodyPr wrap="none">
+            <a:spAutoFit/>
+          </a:bodyPr>
+          <a:lstStyle/>
+          <a:p>
+            <a:r>
+              <a:rPr sz="1000">
                 <a:solidFill>
                   <a:srgbClr val="5F6360"/>
                 </a:solidFill>
@@ -7711,7 +7761,7 @@
         <p:spPr>
           <a:xfrm>
             <a:off x="777240" y="1965960"/>
-            <a:ext cx="10607040" cy="4206240"/>
+            <a:ext cx="10607040" cy="1657350"/>
           </a:xfrm>
           <a:prstGeom prst="rect">
             <a:avLst/>
@@ -7724,9 +7774,13 @@
           </a:bodyPr>
           <a:lstStyle/>
           <a:p>
-            <a:pPr algn="l"/>
-            <a:r>
-              <a:rPr sz="1700">
+            <a:pPr>
+              <a:spcAft>
+                <a:spcPts val="400"/>
+              </a:spcAft>
+            </a:pPr>
+            <a:r>
+              <a:rPr sz="1700" b="0">
                 <a:solidFill>
                   <a:srgbClr val="2B4A7D"/>
                 </a:solidFill>
@@ -7736,9 +7790,13 @@
             </a:r>
           </a:p>
           <a:p>
-            <a:pPr algn="l"/>
-            <a:r>
-              <a:rPr sz="1700">
+            <a:pPr>
+              <a:spcAft>
+                <a:spcPts val="400"/>
+              </a:spcAft>
+            </a:pPr>
+            <a:r>
+              <a:rPr sz="1700" b="0">
                 <a:solidFill>
                   <a:srgbClr val="2B4A7D"/>
                 </a:solidFill>
@@ -7748,9 +7806,13 @@
             </a:r>
           </a:p>
           <a:p>
-            <a:pPr algn="l"/>
-            <a:r>
-              <a:rPr sz="1700">
+            <a:pPr>
+              <a:spcAft>
+                <a:spcPts val="400"/>
+              </a:spcAft>
+            </a:pPr>
+            <a:r>
+              <a:rPr sz="1700" b="0">
                 <a:solidFill>
                   <a:srgbClr val="2B4A7D"/>
                 </a:solidFill>
@@ -7760,9 +7822,13 @@
             </a:r>
           </a:p>
           <a:p>
-            <a:pPr algn="l"/>
-            <a:r>
-              <a:rPr sz="1700">
+            <a:pPr>
+              <a:spcAft>
+                <a:spcPts val="400"/>
+              </a:spcAft>
+            </a:pPr>
+            <a:r>
+              <a:rPr sz="1700" b="0">
                 <a:solidFill>
                   <a:srgbClr val="2B4A7D"/>
                 </a:solidFill>
@@ -7772,74 +7838,103 @@
             </a:r>
           </a:p>
           <a:p>
-            <a:pPr algn="l"/>
-            <a:r>
-              <a:rPr sz="1700">
+            <a:pPr>
+              <a:spcAft>
+                <a:spcPts val="400"/>
+              </a:spcAft>
+            </a:pPr>
+          </a:p>
+          <a:p>
+            <a:pPr>
+              <a:spcAft>
+                <a:spcPts val="400"/>
+              </a:spcAft>
+            </a:pPr>
+            <a:r>
+              <a:rPr sz="1700" b="0">
                 <a:solidFill>
                   <a:srgbClr val="2B4A7D"/>
                 </a:solidFill>
                 <a:latin typeface="Consolas"/>
               </a:rPr>
-              <a:t> </a:t>
-            </a:r>
-          </a:p>
-          <a:p>
-            <a:pPr algn="l"/>
-            <a:r>
-              <a:rPr sz="1700">
+              <a:t>print(total)</a:t>
+            </a:r>
+          </a:p>
+        </p:txBody>
+      </p:sp>
+      <p:sp>
+        <p:nvSpPr>
+          <p:cNvPr id="5" name="TextBox 4"/>
+          <p:cNvSpPr txBox="1"/>
+          <p:nvPr/>
+        </p:nvSpPr>
+        <p:spPr>
+          <a:xfrm>
+            <a:off x="777240" y="3760470"/>
+            <a:ext cx="10607040" cy="502920"/>
+          </a:xfrm>
+          <a:prstGeom prst="rect">
+            <a:avLst/>
+          </a:prstGeom>
+          <a:noFill/>
+        </p:spPr>
+        <p:txBody>
+          <a:bodyPr wrap="square">
+            <a:spAutoFit/>
+          </a:bodyPr>
+          <a:lstStyle/>
+          <a:p>
+            <a:pPr>
+              <a:spcAft>
+                <a:spcPts val="400"/>
+              </a:spcAft>
+            </a:pPr>
+            <a:r>
+              <a:rPr sz="1700" b="0">
                 <a:solidFill>
                   <a:srgbClr val="2B4A7D"/>
                 </a:solidFill>
                 <a:latin typeface="Consolas"/>
               </a:rPr>
-              <a:t>print(total)</a:t>
-            </a:r>
-          </a:p>
-          <a:p>
-            <a:pPr algn="l"/>
-            <a:r>
-              <a:rPr b="0" sz="2100">
+              <a:t>25720</a:t>
+            </a:r>
+          </a:p>
+        </p:txBody>
+      </p:sp>
+      <p:sp>
+        <p:nvSpPr>
+          <p:cNvPr id="6" name="TextBox 5"/>
+          <p:cNvSpPr txBox="1"/>
+          <p:nvPr/>
+        </p:nvSpPr>
+        <p:spPr>
+          <a:xfrm>
+            <a:off x="777240" y="4400550"/>
+            <a:ext cx="10607040" cy="790575"/>
+          </a:xfrm>
+          <a:prstGeom prst="rect">
+            <a:avLst/>
+          </a:prstGeom>
+          <a:noFill/>
+        </p:spPr>
+        <p:txBody>
+          <a:bodyPr wrap="square">
+            <a:spAutoFit/>
+          </a:bodyPr>
+          <a:lstStyle/>
+          <a:p>
+            <a:pPr>
+              <a:spcAft>
+                <a:spcPts val="1000"/>
+              </a:spcAft>
+            </a:pPr>
+            <a:r>
+              <a:rPr sz="2100" b="0">
                 <a:solidFill>
                   <a:srgbClr val="1C1C1A"/>
                 </a:solidFill>
                 <a:latin typeface="Calibri"/>
               </a:rPr>
-              <a:t> </a:t>
-            </a:r>
-          </a:p>
-          <a:p>
-            <a:pPr algn="l"/>
-            <a:r>
-              <a:rPr sz="1700">
-                <a:solidFill>
-                  <a:srgbClr val="2B4A7D"/>
-                </a:solidFill>
-                <a:latin typeface="Consolas"/>
-              </a:rPr>
-              <a:t>25720</a:t>
-            </a:r>
-          </a:p>
-          <a:p>
-            <a:pPr algn="l"/>
-            <a:r>
-              <a:rPr b="0" sz="2100">
-                <a:solidFill>
-                  <a:srgbClr val="1C1C1A"/>
-                </a:solidFill>
-                <a:latin typeface="Calibri"/>
-              </a:rPr>
-              <a:t> </a:t>
-            </a:r>
-          </a:p>
-          <a:p>
-            <a:pPr algn="l"/>
-            <a:r>
-              <a:rPr b="0" sz="2100">
-                <a:solidFill>
-                  <a:srgbClr val="1C1C1A"/>
-                </a:solidFill>
-                <a:latin typeface="Calibri"/>
-              </a:rPr>
               <a:t>The shape is the same and the amount goes in where the one was. That is 13 delivered orders totalling Rs 25,720, which is the number the notebook handed you at the start of the day.</a:t>
             </a:r>
           </a:p>
@@ -7847,13 +7942,13 @@
       </p:sp>
       <p:sp>
         <p:nvSpPr>
-          <p:cNvPr id="5" name="TextBox 4"/>
-          <p:cNvSpPr txBox="1"/>
-          <p:nvPr/>
-        </p:nvSpPr>
-        <p:spPr>
-          <a:xfrm>
-            <a:off x="777240" y="6263640"/>
+          <p:cNvPr id="7" name="TextBox 6"/>
+          <p:cNvSpPr txBox="1"/>
+          <p:nvPr/>
+        </p:nvSpPr>
+        <p:spPr>
+          <a:xfrm>
+            <a:off x="777240" y="6309360"/>
             <a:ext cx="10607040" cy="365760"/>
           </a:xfrm>
           <a:prstGeom prst="rect">
@@ -7862,13 +7957,13 @@
           <a:noFill/>
         </p:spPr>
         <p:txBody>
-          <a:bodyPr wrap="square">
-            <a:spAutoFit/>
-          </a:bodyPr>
-          <a:lstStyle/>
-          <a:p>
-            <a:r>
-              <a:rPr sz="1000" b="0">
+          <a:bodyPr wrap="none">
+            <a:spAutoFit/>
+          </a:bodyPr>
+          <a:lstStyle/>
+          <a:p>
+            <a:r>
+              <a:rPr sz="1000">
                 <a:solidFill>
                   <a:srgbClr val="5F6360"/>
                 </a:solidFill>
@@ -7984,7 +8079,7 @@
         <p:spPr>
           <a:xfrm>
             <a:off x="777240" y="1965960"/>
-            <a:ext cx="10607040" cy="4206240"/>
+            <a:ext cx="10607040" cy="1657350"/>
           </a:xfrm>
           <a:prstGeom prst="rect">
             <a:avLst/>
@@ -7997,9 +8092,13 @@
           </a:bodyPr>
           <a:lstStyle/>
           <a:p>
-            <a:pPr algn="l"/>
-            <a:r>
-              <a:rPr sz="1700">
+            <a:pPr>
+              <a:spcAft>
+                <a:spcPts val="400"/>
+              </a:spcAft>
+            </a:pPr>
+            <a:r>
+              <a:rPr sz="1700" b="0">
                 <a:solidFill>
                   <a:srgbClr val="2B4A7D"/>
                 </a:solidFill>
@@ -8009,9 +8108,13 @@
             </a:r>
           </a:p>
           <a:p>
-            <a:pPr algn="l"/>
-            <a:r>
-              <a:rPr sz="1700">
+            <a:pPr>
+              <a:spcAft>
+                <a:spcPts val="400"/>
+              </a:spcAft>
+            </a:pPr>
+            <a:r>
+              <a:rPr sz="1700" b="0">
                 <a:solidFill>
                   <a:srgbClr val="2B4A7D"/>
                 </a:solidFill>
@@ -8021,9 +8124,13 @@
             </a:r>
           </a:p>
           <a:p>
-            <a:pPr algn="l"/>
-            <a:r>
-              <a:rPr sz="1700">
+            <a:pPr>
+              <a:spcAft>
+                <a:spcPts val="400"/>
+              </a:spcAft>
+            </a:pPr>
+            <a:r>
+              <a:rPr sz="1700" b="0">
                 <a:solidFill>
                   <a:srgbClr val="2B4A7D"/>
                 </a:solidFill>
@@ -8033,9 +8140,13 @@
             </a:r>
           </a:p>
           <a:p>
-            <a:pPr algn="l"/>
-            <a:r>
-              <a:rPr sz="1700">
+            <a:pPr>
+              <a:spcAft>
+                <a:spcPts val="400"/>
+              </a:spcAft>
+            </a:pPr>
+            <a:r>
+              <a:rPr sz="1700" b="0">
                 <a:solidFill>
                   <a:srgbClr val="2B4A7D"/>
                 </a:solidFill>
@@ -8045,98 +8156,119 @@
             </a:r>
           </a:p>
           <a:p>
-            <a:pPr algn="l"/>
-            <a:r>
-              <a:rPr sz="1700">
+            <a:pPr>
+              <a:spcAft>
+                <a:spcPts val="400"/>
+              </a:spcAft>
+            </a:pPr>
+          </a:p>
+          <a:p>
+            <a:pPr>
+              <a:spcAft>
+                <a:spcPts val="400"/>
+              </a:spcAft>
+            </a:pPr>
+            <a:r>
+              <a:rPr sz="1700" b="0">
                 <a:solidFill>
                   <a:srgbClr val="2B4A7D"/>
                 </a:solidFill>
                 <a:latin typeface="Consolas"/>
               </a:rPr>
-              <a:t> </a:t>
-            </a:r>
-          </a:p>
-          <a:p>
-            <a:pPr algn="l"/>
-            <a:r>
-              <a:rPr sz="1700">
+              <a:t>print(total)</a:t>
+            </a:r>
+          </a:p>
+        </p:txBody>
+      </p:sp>
+      <p:sp>
+        <p:nvSpPr>
+          <p:cNvPr id="5" name="TextBox 4"/>
+          <p:cNvSpPr txBox="1"/>
+          <p:nvPr/>
+        </p:nvSpPr>
+        <p:spPr>
+          <a:xfrm>
+            <a:off x="777240" y="3760470"/>
+            <a:ext cx="10607040" cy="502920"/>
+          </a:xfrm>
+          <a:prstGeom prst="rect">
+            <a:avLst/>
+          </a:prstGeom>
+          <a:noFill/>
+        </p:spPr>
+        <p:txBody>
+          <a:bodyPr wrap="square">
+            <a:spAutoFit/>
+          </a:bodyPr>
+          <a:lstStyle/>
+          <a:p>
+            <a:pPr>
+              <a:spcAft>
+                <a:spcPts val="400"/>
+              </a:spcAft>
+            </a:pPr>
+            <a:r>
+              <a:rPr sz="1700" b="0">
                 <a:solidFill>
                   <a:srgbClr val="2B4A7D"/>
                 </a:solidFill>
                 <a:latin typeface="Consolas"/>
               </a:rPr>
-              <a:t>print(total)</a:t>
-            </a:r>
-          </a:p>
-          <a:p>
-            <a:pPr algn="l"/>
-            <a:r>
-              <a:rPr b="0" sz="2100">
+              <a:t>1460</a:t>
+            </a:r>
+          </a:p>
+        </p:txBody>
+      </p:sp>
+      <p:sp>
+        <p:nvSpPr>
+          <p:cNvPr id="6" name="TextBox 5"/>
+          <p:cNvSpPr txBox="1"/>
+          <p:nvPr/>
+        </p:nvSpPr>
+        <p:spPr>
+          <a:xfrm>
+            <a:off x="777240" y="4400550"/>
+            <a:ext cx="10607040" cy="1162050"/>
+          </a:xfrm>
+          <a:prstGeom prst="rect">
+            <a:avLst/>
+          </a:prstGeom>
+          <a:noFill/>
+        </p:spPr>
+        <p:txBody>
+          <a:bodyPr wrap="square">
+            <a:spAutoFit/>
+          </a:bodyPr>
+          <a:lstStyle/>
+          <a:p>
+            <a:pPr>
+              <a:spcAft>
+                <a:spcPts val="1000"/>
+              </a:spcAft>
+            </a:pPr>
+            <a:r>
+              <a:rPr sz="2100" b="0">
                 <a:solidFill>
                   <a:srgbClr val="1C1C1A"/>
                 </a:solidFill>
                 <a:latin typeface="Calibri"/>
               </a:rPr>
-              <a:t> </a:t>
-            </a:r>
-          </a:p>
-          <a:p>
-            <a:pPr algn="l"/>
-            <a:r>
-              <a:rPr sz="1700">
-                <a:solidFill>
-                  <a:srgbClr val="2B4A7D"/>
-                </a:solidFill>
-                <a:latin typeface="Consolas"/>
-              </a:rPr>
-              <a:t>1460</a:t>
-            </a:r>
-          </a:p>
-          <a:p>
-            <a:pPr algn="l"/>
-            <a:r>
-              <a:rPr b="0" sz="2100">
+              <a:t>This runs and it prints a number. Rs 1,460 is the amount of KR4224, the last delivered order in the file, and it is a total of nothing at all.</a:t>
+            </a:r>
+          </a:p>
+          <a:p>
+            <a:pPr>
+              <a:spcAft>
+                <a:spcPts val="1000"/>
+              </a:spcAft>
+            </a:pPr>
+            <a:r>
+              <a:rPr sz="2100" b="0">
                 <a:solidFill>
                   <a:srgbClr val="1C1C1A"/>
                 </a:solidFill>
                 <a:latin typeface="Calibri"/>
               </a:rPr>
-              <a:t> </a:t>
-            </a:r>
-          </a:p>
-          <a:p>
-            <a:pPr algn="l"/>
-            <a:r>
-              <a:rPr b="0" sz="2100">
-                <a:solidFill>
-                  <a:srgbClr val="1C1C1A"/>
-                </a:solidFill>
-                <a:latin typeface="Calibri"/>
-              </a:rPr>
-              <a:t>This runs and it prints a number. Rs 1,460 is the amount of KR4224, the last delivered order in the file, and it is a total of nothing at all.</a:t>
-            </a:r>
-          </a:p>
-          <a:p>
-            <a:pPr algn="l"/>
-            <a:r>
-              <a:rPr b="0" sz="2100">
-                <a:solidFill>
-                  <a:srgbClr val="1C1C1A"/>
-                </a:solidFill>
-                <a:latin typeface="Calibri"/>
-              </a:rPr>
-              <a:t> </a:t>
-            </a:r>
-          </a:p>
-          <a:p>
-            <a:pPr algn="l"/>
-            <a:r>
-              <a:rPr b="0" sz="2100">
-                <a:solidFill>
-                  <a:srgbClr val="1C1C1A"/>
-                </a:solidFill>
-                <a:latin typeface="Calibri"/>
-              </a:rPr>
               <a:t>Which line is in the wrong place?</a:t>
             </a:r>
           </a:p>
@@ -8144,13 +8276,13 @@
       </p:sp>
       <p:sp>
         <p:nvSpPr>
-          <p:cNvPr id="5" name="TextBox 4"/>
-          <p:cNvSpPr txBox="1"/>
-          <p:nvPr/>
-        </p:nvSpPr>
-        <p:spPr>
-          <a:xfrm>
-            <a:off x="777240" y="6263640"/>
+          <p:cNvPr id="7" name="TextBox 6"/>
+          <p:cNvSpPr txBox="1"/>
+          <p:nvPr/>
+        </p:nvSpPr>
+        <p:spPr>
+          <a:xfrm>
+            <a:off x="777240" y="6309360"/>
             <a:ext cx="10607040" cy="365760"/>
           </a:xfrm>
           <a:prstGeom prst="rect">
@@ -8159,13 +8291,13 @@
           <a:noFill/>
         </p:spPr>
         <p:txBody>
-          <a:bodyPr wrap="square">
-            <a:spAutoFit/>
-          </a:bodyPr>
-          <a:lstStyle/>
-          <a:p>
-            <a:r>
-              <a:rPr sz="1000" b="0">
+          <a:bodyPr wrap="none">
+            <a:spAutoFit/>
+          </a:bodyPr>
+          <a:lstStyle/>
+          <a:p>
+            <a:r>
+              <a:rPr sz="1000">
                 <a:solidFill>
                   <a:srgbClr val="5F6360"/>
                 </a:solidFill>
@@ -8281,7 +8413,7 @@
         <p:spPr>
           <a:xfrm>
             <a:off x="777240" y="1965960"/>
-            <a:ext cx="10607040" cy="4206240"/>
+            <a:ext cx="10607040" cy="1533525"/>
           </a:xfrm>
           <a:prstGeom prst="rect">
             <a:avLst/>
@@ -8294,9 +8426,13 @@
           </a:bodyPr>
           <a:lstStyle/>
           <a:p>
-            <a:pPr algn="l"/>
-            <a:r>
-              <a:rPr b="0" sz="2100">
+            <a:pPr>
+              <a:spcAft>
+                <a:spcPts val="1000"/>
+              </a:spcAft>
+            </a:pPr>
+            <a:r>
+              <a:rPr sz="2100" b="0">
                 <a:solidFill>
                   <a:srgbClr val="1C1C1A"/>
                 </a:solidFill>
@@ -8306,50 +8442,34 @@
             </a:r>
           </a:p>
           <a:p>
-            <a:pPr algn="l"/>
-            <a:r>
-              <a:rPr b="0" sz="2100">
+            <a:pPr>
+              <a:spcAft>
+                <a:spcPts val="1000"/>
+              </a:spcAft>
+            </a:pPr>
+            <a:r>
+              <a:rPr sz="2100" b="0">
                 <a:solidFill>
                   <a:srgbClr val="1C1C1A"/>
                 </a:solidFill>
                 <a:latin typeface="Calibri"/>
               </a:rPr>
-              <a:t> </a:t>
-            </a:r>
-          </a:p>
-          <a:p>
-            <a:pPr algn="l"/>
-            <a:r>
-              <a:rPr b="0" sz="2100">
+              <a:t>The answer was 13 delivered orders, totalling Rs 25,720.</a:t>
+            </a:r>
+          </a:p>
+          <a:p>
+            <a:pPr>
+              <a:spcAft>
+                <a:spcPts val="1000"/>
+              </a:spcAft>
+            </a:pPr>
+            <a:r>
+              <a:rPr sz="2100" b="0">
                 <a:solidFill>
                   <a:srgbClr val="1C1C1A"/>
                 </a:solidFill>
                 <a:latin typeface="Calibri"/>
               </a:rPr>
-              <a:t>The answer was 13 delivered orders, totalling Rs 25,720.</a:t>
-            </a:r>
-          </a:p>
-          <a:p>
-            <a:pPr algn="l"/>
-            <a:r>
-              <a:rPr b="0" sz="2100">
-                <a:solidFill>
-                  <a:srgbClr val="1C1C1A"/>
-                </a:solidFill>
-                <a:latin typeface="Calibri"/>
-              </a:rPr>
-              <a:t> </a:t>
-            </a:r>
-          </a:p>
-          <a:p>
-            <a:pPr algn="l"/>
-            <a:r>
-              <a:rPr b="0" sz="2100">
-                <a:solidFill>
-                  <a:srgbClr val="1C1C1A"/>
-                </a:solidFill>
-                <a:latin typeface="Calibri"/>
-              </a:rPr>
               <a:t>Nobody explained those records to you before the notebook ran, and that is the situation you will be hired into.</a:t>
             </a:r>
           </a:p>
@@ -8363,7 +8483,7 @@
         </p:nvSpPr>
         <p:spPr>
           <a:xfrm>
-            <a:off x="777240" y="6263640"/>
+            <a:off x="777240" y="6309360"/>
             <a:ext cx="10607040" cy="365760"/>
           </a:xfrm>
           <a:prstGeom prst="rect">
@@ -8372,13 +8492,13 @@
           <a:noFill/>
         </p:spPr>
         <p:txBody>
-          <a:bodyPr wrap="square">
-            <a:spAutoFit/>
-          </a:bodyPr>
-          <a:lstStyle/>
-          <a:p>
-            <a:r>
-              <a:rPr sz="1000" b="0">
+          <a:bodyPr wrap="none">
+            <a:spAutoFit/>
+          </a:bodyPr>
+          <a:lstStyle/>
+          <a:p>
+            <a:r>
+              <a:rPr sz="1000">
                 <a:solidFill>
                   <a:srgbClr val="5F6360"/>
                 </a:solidFill>
@@ -8494,7 +8614,7 @@
         <p:spPr>
           <a:xfrm>
             <a:off x="777240" y="1965960"/>
-            <a:ext cx="10607040" cy="4206240"/>
+            <a:ext cx="10607040" cy="1657350"/>
           </a:xfrm>
           <a:prstGeom prst="rect">
             <a:avLst/>
@@ -8507,86 +8627,66 @@
           </a:bodyPr>
           <a:lstStyle/>
           <a:p>
-            <a:pPr algn="l"/>
-            <a:r>
-              <a:rPr b="0" sz="2100">
+            <a:pPr>
+              <a:spcAft>
+                <a:spcPts val="1000"/>
+              </a:spcAft>
+            </a:pPr>
+            <a:r>
+              <a:rPr sz="2100" b="0">
                 <a:solidFill>
                   <a:srgbClr val="1C1C1A"/>
                 </a:solidFill>
                 <a:latin typeface="Calibri"/>
               </a:rPr>
-              <a:t>1. Ask </a:t>
-            </a:r>
-            <a:r>
-              <a:rPr b="0" sz="1800">
-                <a:solidFill>
-                  <a:srgbClr val="2B4A7D"/>
-                </a:solidFill>
-                <a:latin typeface="Consolas"/>
-              </a:rPr>
-              <a:t>type()</a:t>
-            </a:r>
-            <a:r>
-              <a:rPr b="0" sz="2100">
+              <a:t>1. Ask type() when an operator surprises you.</a:t>
+            </a:r>
+          </a:p>
+          <a:p>
+            <a:pPr>
+              <a:spcAft>
+                <a:spcPts val="1000"/>
+              </a:spcAft>
+            </a:pPr>
+            <a:r>
+              <a:rPr sz="2100" b="0">
                 <a:solidFill>
                   <a:srgbClr val="1C1C1A"/>
                 </a:solidFill>
                 <a:latin typeface="Calibri"/>
               </a:rPr>
-              <a:t> when an operator surprises you.</a:t>
-            </a:r>
-          </a:p>
-          <a:p>
-            <a:pPr algn="l"/>
-            <a:r>
-              <a:rPr b="0" sz="2100">
+              <a:t>2. Read both type names in a TypeError before you touch the code.</a:t>
+            </a:r>
+          </a:p>
+          <a:p>
+            <a:pPr>
+              <a:spcAft>
+                <a:spcPts val="1000"/>
+              </a:spcAft>
+            </a:pPr>
+            <a:r>
+              <a:rPr sz="2100" b="0">
                 <a:solidFill>
                   <a:srgbClr val="1C1C1A"/>
                 </a:solidFill>
                 <a:latin typeface="Calibri"/>
               </a:rPr>
-              <a:t>2. Read both type names in a </a:t>
-            </a:r>
-            <a:r>
-              <a:rPr b="0" sz="1800">
-                <a:solidFill>
-                  <a:srgbClr val="2B4A7D"/>
-                </a:solidFill>
-                <a:latin typeface="Consolas"/>
-              </a:rPr>
-              <a:t>TypeError</a:t>
-            </a:r>
-            <a:r>
-              <a:rPr b="0" sz="2100">
+              <a:t>3. Set the accumulator to zero once, above the loop.</a:t>
+            </a:r>
+          </a:p>
+          <a:p>
+            <a:pPr>
+              <a:spcAft>
+                <a:spcPts val="1000"/>
+              </a:spcAft>
+            </a:pPr>
+            <a:r>
+              <a:rPr sz="2100" b="0">
                 <a:solidFill>
                   <a:srgbClr val="1C1C1A"/>
                 </a:solidFill>
                 <a:latin typeface="Calibri"/>
               </a:rPr>
-              <a:t> before you touch the code.</a:t>
-            </a:r>
-          </a:p>
-          <a:p>
-            <a:pPr algn="l"/>
-            <a:r>
-              <a:rPr b="0" sz="2100">
-                <a:solidFill>
-                  <a:srgbClr val="1C1C1A"/>
-                </a:solidFill>
-                <a:latin typeface="Calibri"/>
-              </a:rPr>
-              <a:t>3. Set the accumulator to zero once, above the loop.</a:t>
-            </a:r>
-          </a:p>
-          <a:p>
-            <a:pPr algn="l"/>
-            <a:r>
-              <a:rPr b="0" sz="2100">
-                <a:solidFill>
-                  <a:srgbClr val="1C1C1A"/>
-                </a:solidFill>
-                <a:latin typeface="Calibri"/>
-              </a:rPr>
               <a:t>4. When a number looks wrong, go and find the record that explains it.</a:t>
             </a:r>
           </a:p>
@@ -8600,7 +8700,7 @@
         </p:nvSpPr>
         <p:spPr>
           <a:xfrm>
-            <a:off x="777240" y="6263640"/>
+            <a:off x="777240" y="6309360"/>
             <a:ext cx="10607040" cy="365760"/>
           </a:xfrm>
           <a:prstGeom prst="rect">
@@ -8609,13 +8709,13 @@
           <a:noFill/>
         </p:spPr>
         <p:txBody>
-          <a:bodyPr wrap="square">
-            <a:spAutoFit/>
-          </a:bodyPr>
-          <a:lstStyle/>
-          <a:p>
-            <a:r>
-              <a:rPr sz="1000" b="0">
+          <a:bodyPr wrap="none">
+            <a:spAutoFit/>
+          </a:bodyPr>
+          <a:lstStyle/>
+          <a:p>
+            <a:r>
+              <a:rPr sz="1000">
                 <a:solidFill>
                   <a:srgbClr val="5F6360"/>
                 </a:solidFill>
@@ -8731,7 +8831,7 @@
         <p:spPr>
           <a:xfrm>
             <a:off x="777240" y="1965960"/>
-            <a:ext cx="10607040" cy="4206240"/>
+            <a:ext cx="10607040" cy="1162050"/>
           </a:xfrm>
           <a:prstGeom prst="rect">
             <a:avLst/>
@@ -8744,9 +8844,13 @@
           </a:bodyPr>
           <a:lstStyle/>
           <a:p>
-            <a:pPr algn="l"/>
-            <a:r>
-              <a:rPr b="0" sz="2100">
+            <a:pPr>
+              <a:spcAft>
+                <a:spcPts val="1000"/>
+              </a:spcAft>
+            </a:pPr>
+            <a:r>
+              <a:rPr sz="2100" b="0">
                 <a:solidFill>
                   <a:srgbClr val="1C1C1A"/>
                 </a:solidFill>
@@ -8756,26 +8860,18 @@
             </a:r>
           </a:p>
           <a:p>
-            <a:pPr algn="l"/>
-            <a:r>
-              <a:rPr b="0" sz="2100">
+            <a:pPr>
+              <a:spcAft>
+                <a:spcPts val="1000"/>
+              </a:spcAft>
+            </a:pPr>
+            <a:r>
+              <a:rPr sz="2100" b="0">
                 <a:solidFill>
                   <a:srgbClr val="1C1C1A"/>
                 </a:solidFill>
                 <a:latin typeface="Calibri"/>
               </a:rPr>
-              <a:t> </a:t>
-            </a:r>
-          </a:p>
-          <a:p>
-            <a:pPr algn="l"/>
-            <a:r>
-              <a:rPr b="0" sz="2100">
-                <a:solidFill>
-                  <a:srgbClr val="1C1C1A"/>
-                </a:solidFill>
-                <a:latin typeface="Calibri"/>
-              </a:rPr>
               <a:t>The kernel remembers exactly what you gave it and nothing else, and the type of a value decides what every operator means.</a:t>
             </a:r>
           </a:p>
@@ -8789,7 +8885,7 @@
         </p:nvSpPr>
         <p:spPr>
           <a:xfrm>
-            <a:off x="777240" y="6263640"/>
+            <a:off x="777240" y="6309360"/>
             <a:ext cx="10607040" cy="365760"/>
           </a:xfrm>
           <a:prstGeom prst="rect">
@@ -8798,13 +8894,13 @@
           <a:noFill/>
         </p:spPr>
         <p:txBody>
-          <a:bodyPr wrap="square">
-            <a:spAutoFit/>
-          </a:bodyPr>
-          <a:lstStyle/>
-          <a:p>
-            <a:r>
-              <a:rPr sz="1000" b="0">
+          <a:bodyPr wrap="none">
+            <a:spAutoFit/>
+          </a:bodyPr>
+          <a:lstStyle/>
+          <a:p>
+            <a:r>
+              <a:rPr sz="1000">
                 <a:solidFill>
                   <a:srgbClr val="5F6360"/>
                 </a:solidFill>
@@ -8920,7 +9016,7 @@
         <p:spPr>
           <a:xfrm>
             <a:off x="777240" y="1965960"/>
-            <a:ext cx="10607040" cy="4206240"/>
+            <a:ext cx="10607040" cy="1162050"/>
           </a:xfrm>
           <a:prstGeom prst="rect">
             <a:avLst/>
@@ -8933,9 +9029,13 @@
           </a:bodyPr>
           <a:lstStyle/>
           <a:p>
-            <a:pPr algn="l"/>
-            <a:r>
-              <a:rPr sz="1700">
+            <a:pPr>
+              <a:spcAft>
+                <a:spcPts val="400"/>
+              </a:spcAft>
+            </a:pPr>
+            <a:r>
+              <a:rPr sz="1700" b="0">
                 <a:solidFill>
                   <a:srgbClr val="2B4A7D"/>
                 </a:solidFill>
@@ -8945,9 +9045,13 @@
             </a:r>
           </a:p>
           <a:p>
-            <a:pPr algn="l"/>
-            <a:r>
-              <a:rPr sz="1700">
+            <a:pPr>
+              <a:spcAft>
+                <a:spcPts val="400"/>
+              </a:spcAft>
+            </a:pPr>
+            <a:r>
+              <a:rPr sz="1700" b="0">
                 <a:solidFill>
                   <a:srgbClr val="2B4A7D"/>
                 </a:solidFill>
@@ -8957,9 +9061,13 @@
             </a:r>
           </a:p>
           <a:p>
-            <a:pPr algn="l"/>
-            <a:r>
-              <a:rPr sz="1700">
+            <a:pPr>
+              <a:spcAft>
+                <a:spcPts val="400"/>
+              </a:spcAft>
+            </a:pPr>
+            <a:r>
+              <a:rPr sz="1700" b="0">
                 <a:solidFill>
                   <a:srgbClr val="2B4A7D"/>
                 </a:solidFill>
@@ -8969,9 +9077,13 @@
             </a:r>
           </a:p>
           <a:p>
-            <a:pPr algn="l"/>
-            <a:r>
-              <a:rPr sz="1700">
+            <a:pPr>
+              <a:spcAft>
+                <a:spcPts val="400"/>
+              </a:spcAft>
+            </a:pPr>
+            <a:r>
+              <a:rPr sz="1700" b="0">
                 <a:solidFill>
                   <a:srgbClr val="2B4A7D"/>
                 </a:solidFill>
@@ -8980,27 +9092,42 @@
               <a:t>        total = total + int(r["amount"])</a:t>
             </a:r>
           </a:p>
-          <a:p>
-            <a:pPr algn="l"/>
-            <a:r>
-              <a:rPr b="0" sz="2100">
+        </p:txBody>
+      </p:sp>
+      <p:sp>
+        <p:nvSpPr>
+          <p:cNvPr id="5" name="TextBox 4"/>
+          <p:cNvSpPr txBox="1"/>
+          <p:nvPr/>
+        </p:nvSpPr>
+        <p:spPr>
+          <a:xfrm>
+            <a:off x="777240" y="3265169"/>
+            <a:ext cx="10607040" cy="542925"/>
+          </a:xfrm>
+          <a:prstGeom prst="rect">
+            <a:avLst/>
+          </a:prstGeom>
+          <a:noFill/>
+        </p:spPr>
+        <p:txBody>
+          <a:bodyPr wrap="square">
+            <a:spAutoFit/>
+          </a:bodyPr>
+          <a:lstStyle/>
+          <a:p>
+            <a:pPr>
+              <a:spcAft>
+                <a:spcPts val="1000"/>
+              </a:spcAft>
+            </a:pPr>
+            <a:r>
+              <a:rPr sz="2100" b="0">
                 <a:solidFill>
                   <a:srgbClr val="1C1C1A"/>
                 </a:solidFill>
                 <a:latin typeface="Calibri"/>
               </a:rPr>
-              <a:t> </a:t>
-            </a:r>
-          </a:p>
-          <a:p>
-            <a:pPr algn="l"/>
-            <a:r>
-              <a:rPr b="0" sz="2100">
-                <a:solidFill>
-                  <a:srgbClr val="1C1C1A"/>
-                </a:solidFill>
-                <a:latin typeface="Calibri"/>
-              </a:rPr>
               <a:t>Four lines produced that answer. You will have written this before the day ends.</a:t>
             </a:r>
           </a:p>
@@ -9008,13 +9135,13 @@
       </p:sp>
       <p:sp>
         <p:nvSpPr>
-          <p:cNvPr id="5" name="TextBox 4"/>
-          <p:cNvSpPr txBox="1"/>
-          <p:nvPr/>
-        </p:nvSpPr>
-        <p:spPr>
-          <a:xfrm>
-            <a:off x="777240" y="6263640"/>
+          <p:cNvPr id="6" name="TextBox 5"/>
+          <p:cNvSpPr txBox="1"/>
+          <p:nvPr/>
+        </p:nvSpPr>
+        <p:spPr>
+          <a:xfrm>
+            <a:off x="777240" y="6309360"/>
             <a:ext cx="10607040" cy="365760"/>
           </a:xfrm>
           <a:prstGeom prst="rect">
@@ -9023,13 +9150,13 @@
           <a:noFill/>
         </p:spPr>
         <p:txBody>
-          <a:bodyPr wrap="square">
-            <a:spAutoFit/>
-          </a:bodyPr>
-          <a:lstStyle/>
-          <a:p>
-            <a:r>
-              <a:rPr sz="1000" b="0">
+          <a:bodyPr wrap="none">
+            <a:spAutoFit/>
+          </a:bodyPr>
+          <a:lstStyle/>
+          <a:p>
+            <a:r>
+              <a:rPr sz="1000">
                 <a:solidFill>
                   <a:srgbClr val="5F6360"/>
                 </a:solidFill>
@@ -9124,6 +9251,7 @@
           </a:bodyPr>
           <a:lstStyle/>
           <a:p>
+            <a:pPr algn="ctr"/>
             <a:r>
               <a:rPr sz="3600" b="1">
                 <a:solidFill>
@@ -9145,7 +9273,7 @@
         <p:spPr>
           <a:xfrm>
             <a:off x="777240" y="1965960"/>
-            <a:ext cx="10607040" cy="4206240"/>
+            <a:ext cx="10607040" cy="790575"/>
           </a:xfrm>
           <a:prstGeom prst="rect">
             <a:avLst/>
@@ -9158,22 +9286,26 @@
           </a:bodyPr>
           <a:lstStyle/>
           <a:p>
-            <a:pPr algn="l"/>
-            <a:r>
-              <a:rPr b="1" sz="1800">
+            <a:pPr algn="ctr">
+              <a:spcAft>
+                <a:spcPts val="1000"/>
+              </a:spcAft>
+            </a:pPr>
+            <a:r>
+              <a:rPr sz="2100" b="1">
                 <a:solidFill>
                   <a:srgbClr val="FFFFFF"/>
                 </a:solidFill>
-                <a:latin typeface="Consolas"/>
+                <a:latin typeface="Calibri"/>
               </a:rPr>
               <a:t>[open the workbench]</a:t>
             </a:r>
             <a:r>
-              <a:rPr b="0" sz="1800">
+              <a:rPr sz="2100" b="0">
                 <a:solidFill>
                   <a:srgbClr val="FFFFFF"/>
                 </a:solidFill>
-                <a:latin typeface="Consolas"/>
+                <a:latin typeface="Calibri"/>
               </a:rPr>
               <a:t> &gt; [the kernel remembers] &gt; [type decides] &gt; [walk the records] &gt; [the business answer]</a:t>
             </a:r>
@@ -9188,7 +9320,7 @@
         </p:nvSpPr>
         <p:spPr>
           <a:xfrm>
-            <a:off x="777240" y="6263640"/>
+            <a:off x="777240" y="6309360"/>
             <a:ext cx="10607040" cy="365760"/>
           </a:xfrm>
           <a:prstGeom prst="rect">
@@ -9197,13 +9329,13 @@
           <a:noFill/>
         </p:spPr>
         <p:txBody>
-          <a:bodyPr wrap="square">
-            <a:spAutoFit/>
-          </a:bodyPr>
-          <a:lstStyle/>
-          <a:p>
-            <a:r>
-              <a:rPr sz="1000" b="0">
+          <a:bodyPr wrap="none">
+            <a:spAutoFit/>
+          </a:bodyPr>
+          <a:lstStyle/>
+          <a:p>
+            <a:r>
+              <a:rPr sz="1000">
                 <a:solidFill>
                   <a:srgbClr val="5F6360"/>
                 </a:solidFill>
@@ -9319,7 +9451,7 @@
         <p:spPr>
           <a:xfrm>
             <a:off x="777240" y="1965960"/>
-            <a:ext cx="10607040" cy="4206240"/>
+            <a:ext cx="10607040" cy="1409700"/>
           </a:xfrm>
           <a:prstGeom prst="rect">
             <a:avLst/>
@@ -9332,9 +9464,13 @@
           </a:bodyPr>
           <a:lstStyle/>
           <a:p>
-            <a:pPr algn="l"/>
-            <a:r>
-              <a:rPr b="0" sz="2100">
+            <a:pPr>
+              <a:spcAft>
+                <a:spcPts val="1000"/>
+              </a:spcAft>
+            </a:pPr>
+            <a:r>
+              <a:rPr sz="2100" b="0">
                 <a:solidFill>
                   <a:srgbClr val="1C1C1A"/>
                 </a:solidFill>
@@ -9344,26 +9480,18 @@
             </a:r>
           </a:p>
           <a:p>
-            <a:pPr algn="l"/>
-            <a:r>
-              <a:rPr b="0" sz="2100">
+            <a:pPr>
+              <a:spcAft>
+                <a:spcPts val="1000"/>
+              </a:spcAft>
+            </a:pPr>
+            <a:r>
+              <a:rPr sz="2100" b="0">
                 <a:solidFill>
                   <a:srgbClr val="1C1C1A"/>
                 </a:solidFill>
                 <a:latin typeface="Calibri"/>
               </a:rPr>
-              <a:t> </a:t>
-            </a:r>
-          </a:p>
-          <a:p>
-            <a:pPr algn="l"/>
-            <a:r>
-              <a:rPr b="0" sz="2100">
-                <a:solidFill>
-                  <a:srgbClr val="1C1C1A"/>
-                </a:solidFill>
-                <a:latin typeface="Calibri"/>
-              </a:rPr>
               <a:t>Nothing is installed on your laptop and nothing needs to be. The Codespace you open today is the environment for the whole programme.</a:t>
             </a:r>
           </a:p>
@@ -9377,7 +9505,7 @@
         </p:nvSpPr>
         <p:spPr>
           <a:xfrm>
-            <a:off x="777240" y="6263640"/>
+            <a:off x="777240" y="6309360"/>
             <a:ext cx="10607040" cy="365760"/>
           </a:xfrm>
           <a:prstGeom prst="rect">
@@ -9386,13 +9514,13 @@
           <a:noFill/>
         </p:spPr>
         <p:txBody>
-          <a:bodyPr wrap="square">
-            <a:spAutoFit/>
-          </a:bodyPr>
-          <a:lstStyle/>
-          <a:p>
-            <a:r>
-              <a:rPr sz="1000" b="0">
+          <a:bodyPr wrap="none">
+            <a:spAutoFit/>
+          </a:bodyPr>
+          <a:lstStyle/>
+          <a:p>
+            <a:r>
+              <a:rPr sz="1000">
                 <a:solidFill>
                   <a:srgbClr val="5F6360"/>
                 </a:solidFill>
@@ -9508,7 +9636,7 @@
         <p:spPr>
           <a:xfrm>
             <a:off x="777240" y="1965960"/>
-            <a:ext cx="10607040" cy="4206240"/>
+            <a:ext cx="10607040" cy="2524125"/>
           </a:xfrm>
           <a:prstGeom prst="rect">
             <a:avLst/>
@@ -9521,9 +9649,13 @@
           </a:bodyPr>
           <a:lstStyle/>
           <a:p>
-            <a:pPr algn="l"/>
-            <a:r>
-              <a:rPr b="0" sz="2100">
+            <a:pPr>
+              <a:spcAft>
+                <a:spcPts val="1000"/>
+              </a:spcAft>
+            </a:pPr>
+            <a:r>
+              <a:rPr sz="2100" b="0">
                 <a:solidFill>
                   <a:srgbClr val="1C1C1A"/>
                 </a:solidFill>
@@ -9533,98 +9665,66 @@
             </a:r>
           </a:p>
           <a:p>
-            <a:pPr algn="l"/>
-            <a:r>
-              <a:rPr b="0" sz="2100">
+            <a:pPr>
+              <a:spcAft>
+                <a:spcPts val="1000"/>
+              </a:spcAft>
+            </a:pPr>
+            <a:r>
+              <a:rPr sz="2100" b="0">
                 <a:solidFill>
                   <a:srgbClr val="1C1C1A"/>
                 </a:solidFill>
                 <a:latin typeface="Calibri"/>
               </a:rPr>
-              <a:t> </a:t>
-            </a:r>
-          </a:p>
-          <a:p>
-            <a:pPr algn="l"/>
-            <a:r>
-              <a:rPr b="0" sz="2100">
+              <a:t>The editor in the middle is where the notebook opens, one cell under another.</a:t>
+            </a:r>
+          </a:p>
+          <a:p>
+            <a:pPr>
+              <a:spcAft>
+                <a:spcPts val="1000"/>
+              </a:spcAft>
+            </a:pPr>
+            <a:r>
+              <a:rPr sz="2100" b="0">
                 <a:solidFill>
                   <a:srgbClr val="1C1C1A"/>
                 </a:solidFill>
                 <a:latin typeface="Calibri"/>
               </a:rPr>
-              <a:t>The editor in the middle is where the notebook opens, one cell under another.</a:t>
-            </a:r>
-          </a:p>
-          <a:p>
-            <a:pPr algn="l"/>
-            <a:r>
-              <a:rPr b="0" sz="2100">
+              <a:t>Each cell has a run button on its left, and the output of that cell appears directly under it.</a:t>
+            </a:r>
+          </a:p>
+          <a:p>
+            <a:pPr>
+              <a:spcAft>
+                <a:spcPts val="1000"/>
+              </a:spcAft>
+            </a:pPr>
+            <a:r>
+              <a:rPr sz="2100" b="0">
                 <a:solidFill>
                   <a:srgbClr val="1C1C1A"/>
                 </a:solidFill>
                 <a:latin typeface="Calibri"/>
               </a:rPr>
-              <a:t> </a:t>
-            </a:r>
-          </a:p>
-          <a:p>
-            <a:pPr algn="l"/>
-            <a:r>
-              <a:rPr b="0" sz="2100">
+              <a:t>The kernel indicator at the top right names the Python that is running your cells.</a:t>
+            </a:r>
+          </a:p>
+          <a:p>
+            <a:pPr>
+              <a:spcAft>
+                <a:spcPts val="1000"/>
+              </a:spcAft>
+            </a:pPr>
+            <a:r>
+              <a:rPr sz="2100" b="0">
                 <a:solidFill>
                   <a:srgbClr val="1C1C1A"/>
                 </a:solidFill>
                 <a:latin typeface="Calibri"/>
               </a:rPr>
-              <a:t>Each cell has a run button on its left, and the output of that cell appears directly under it.</a:t>
-            </a:r>
-          </a:p>
-          <a:p>
-            <a:pPr algn="l"/>
-            <a:r>
-              <a:rPr b="0" sz="2100">
-                <a:solidFill>
-                  <a:srgbClr val="1C1C1A"/>
-                </a:solidFill>
-                <a:latin typeface="Calibri"/>
-              </a:rPr>
-              <a:t> </a:t>
-            </a:r>
-          </a:p>
-          <a:p>
-            <a:pPr algn="l"/>
-            <a:r>
-              <a:rPr b="0" sz="2100">
-                <a:solidFill>
-                  <a:srgbClr val="1C1C1A"/>
-                </a:solidFill>
-                <a:latin typeface="Calibri"/>
-              </a:rPr>
-              <a:t>The kernel indicator at the top right names the Python that is running your cells.</a:t>
-            </a:r>
-          </a:p>
-          <a:p>
-            <a:pPr algn="l"/>
-            <a:r>
-              <a:rPr b="0" sz="2100">
-                <a:solidFill>
-                  <a:srgbClr val="1C1C1A"/>
-                </a:solidFill>
-                <a:latin typeface="Calibri"/>
-              </a:rPr>
-              <a:t> </a:t>
-            </a:r>
-          </a:p>
-          <a:p>
-            <a:pPr algn="l"/>
-            <a:r>
-              <a:rPr b="0" sz="2100">
-                <a:solidFill>
-                  <a:srgbClr val="1C1C1A"/>
-                </a:solidFill>
-                <a:latin typeface="Calibri"/>
-              </a:rPr>
               <a:t>The terminal panel at the bottom is a shell on the same machine, and you have no reason to open it today.</a:t>
             </a:r>
           </a:p>
@@ -9638,7 +9738,7 @@
         </p:nvSpPr>
         <p:spPr>
           <a:xfrm>
-            <a:off x="777240" y="6263640"/>
+            <a:off x="777240" y="6309360"/>
             <a:ext cx="10607040" cy="365760"/>
           </a:xfrm>
           <a:prstGeom prst="rect">
@@ -9647,13 +9747,13 @@
           <a:noFill/>
         </p:spPr>
         <p:txBody>
-          <a:bodyPr wrap="square">
-            <a:spAutoFit/>
-          </a:bodyPr>
-          <a:lstStyle/>
-          <a:p>
-            <a:r>
-              <a:rPr sz="1000" b="0">
+          <a:bodyPr wrap="none">
+            <a:spAutoFit/>
+          </a:bodyPr>
+          <a:lstStyle/>
+          <a:p>
+            <a:r>
+              <a:rPr sz="1000">
                 <a:solidFill>
                   <a:srgbClr val="5F6360"/>
                 </a:solidFill>
@@ -9769,7 +9869,7 @@
         <p:spPr>
           <a:xfrm>
             <a:off x="777240" y="1965960"/>
-            <a:ext cx="10607040" cy="4206240"/>
+            <a:ext cx="10607040" cy="1162050"/>
           </a:xfrm>
           <a:prstGeom prst="rect">
             <a:avLst/>
@@ -9782,9 +9882,13 @@
           </a:bodyPr>
           <a:lstStyle/>
           <a:p>
-            <a:pPr algn="l"/>
-            <a:r>
-              <a:rPr b="0" sz="2100">
+            <a:pPr>
+              <a:spcAft>
+                <a:spcPts val="1000"/>
+              </a:spcAft>
+            </a:pPr>
+            <a:r>
+              <a:rPr sz="2100" b="0">
                 <a:solidFill>
                   <a:srgbClr val="1C1C1A"/>
                 </a:solidFill>
@@ -9794,26 +9898,18 @@
             </a:r>
           </a:p>
           <a:p>
-            <a:pPr algn="l"/>
-            <a:r>
-              <a:rPr b="0" sz="2100">
+            <a:pPr>
+              <a:spcAft>
+                <a:spcPts val="1000"/>
+              </a:spcAft>
+            </a:pPr>
+            <a:r>
+              <a:rPr sz="2100" b="0">
                 <a:solidFill>
                   <a:srgbClr val="1C1C1A"/>
                 </a:solidFill>
                 <a:latin typeface="Calibri"/>
               </a:rPr>
-              <a:t> </a:t>
-            </a:r>
-          </a:p>
-          <a:p>
-            <a:pPr algn="l"/>
-            <a:r>
-              <a:rPr b="0" sz="2100">
-                <a:solidFill>
-                  <a:srgbClr val="1C1C1A"/>
-                </a:solidFill>
-                <a:latin typeface="Calibri"/>
-              </a:rPr>
               <a:t>The output appears under the cell you ran, and it stays on screen until you run that cell again.</a:t>
             </a:r>
           </a:p>
@@ -9827,7 +9923,7 @@
         </p:nvSpPr>
         <p:spPr>
           <a:xfrm>
-            <a:off x="777240" y="6263640"/>
+            <a:off x="777240" y="6309360"/>
             <a:ext cx="10607040" cy="365760"/>
           </a:xfrm>
           <a:prstGeom prst="rect">
@@ -9836,13 +9932,13 @@
           <a:noFill/>
         </p:spPr>
         <p:txBody>
-          <a:bodyPr wrap="square">
-            <a:spAutoFit/>
-          </a:bodyPr>
-          <a:lstStyle/>
-          <a:p>
-            <a:r>
-              <a:rPr sz="1000" b="0">
+          <a:bodyPr wrap="none">
+            <a:spAutoFit/>
+          </a:bodyPr>
+          <a:lstStyle/>
+          <a:p>
+            <a:r>
+              <a:rPr sz="1000">
                 <a:solidFill>
                   <a:srgbClr val="5F6360"/>
                 </a:solidFill>
@@ -9958,7 +10054,7 @@
         <p:spPr>
           <a:xfrm>
             <a:off x="777240" y="1965960"/>
-            <a:ext cx="10607040" cy="4206240"/>
+            <a:ext cx="10607040" cy="1657350"/>
           </a:xfrm>
           <a:prstGeom prst="rect">
             <a:avLst/>
@@ -9971,9 +10067,13 @@
           </a:bodyPr>
           <a:lstStyle/>
           <a:p>
-            <a:pPr algn="l"/>
-            <a:r>
-              <a:rPr b="0" sz="2100">
+            <a:pPr>
+              <a:spcAft>
+                <a:spcPts val="1000"/>
+              </a:spcAft>
+            </a:pPr>
+            <a:r>
+              <a:rPr sz="2100" b="0">
                 <a:solidFill>
                   <a:srgbClr val="1C1C1A"/>
                 </a:solidFill>
@@ -9983,9 +10083,13 @@
             </a:r>
           </a:p>
           <a:p>
-            <a:pPr algn="l"/>
-            <a:r>
-              <a:rPr b="0" sz="2100">
+            <a:pPr>
+              <a:spcAft>
+                <a:spcPts val="1000"/>
+              </a:spcAft>
+            </a:pPr>
+            <a:r>
+              <a:rPr sz="2100" b="0">
                 <a:solidFill>
                   <a:srgbClr val="1C1C1A"/>
                 </a:solidFill>
@@ -9995,9 +10099,13 @@
             </a:r>
           </a:p>
           <a:p>
-            <a:pPr algn="l"/>
-            <a:r>
-              <a:rPr b="0" sz="2100">
+            <a:pPr>
+              <a:spcAft>
+                <a:spcPts val="1000"/>
+              </a:spcAft>
+            </a:pPr>
+            <a:r>
+              <a:rPr sz="2100" b="0">
                 <a:solidFill>
                   <a:srgbClr val="1C1C1A"/>
                 </a:solidFill>
@@ -10007,9 +10115,13 @@
             </a:r>
           </a:p>
           <a:p>
-            <a:pPr algn="l"/>
-            <a:r>
-              <a:rPr b="0" sz="2100">
+            <a:pPr>
+              <a:spcAft>
+                <a:spcPts val="1000"/>
+              </a:spcAft>
+            </a:pPr>
+            <a:r>
+              <a:rPr sz="2100" b="0">
                 <a:solidFill>
                   <a:srgbClr val="1C1C1A"/>
                 </a:solidFill>
@@ -10028,7 +10140,7 @@
         </p:nvSpPr>
         <p:spPr>
           <a:xfrm>
-            <a:off x="777240" y="6263640"/>
+            <a:off x="777240" y="6309360"/>
             <a:ext cx="10607040" cy="365760"/>
           </a:xfrm>
           <a:prstGeom prst="rect">
@@ -10037,13 +10149,13 @@
           <a:noFill/>
         </p:spPr>
         <p:txBody>
-          <a:bodyPr wrap="square">
-            <a:spAutoFit/>
-          </a:bodyPr>
-          <a:lstStyle/>
-          <a:p>
-            <a:r>
-              <a:rPr sz="1000" b="0">
+          <a:bodyPr wrap="none">
+            <a:spAutoFit/>
+          </a:bodyPr>
+          <a:lstStyle/>
+          <a:p>
+            <a:r>
+              <a:rPr sz="1000">
                 <a:solidFill>
                   <a:srgbClr val="5F6360"/>
                 </a:solidFill>
